--- a/09_meetings/IRELAND_Sales_Review_2026/ISZE_IRELAND_Sales_Review_FY2027_ModeA_only.pptx
+++ b/09_meetings/IRELAND_Sales_Review_2026/ISZE_IRELAND_Sales_Review_FY2027_ModeA_only.pptx
@@ -23,7 +23,6 @@
     <p:sldId id="271" r:id="rId22"/>
     <p:sldId id="272" r:id="rId23"/>
     <p:sldId id="273" r:id="rId24"/>
-    <p:sldId id="274" r:id="rId25"/>
   </p:sldIdLst>
   <p:sldSz cx="12188952" cy="6858000" type="screen4x3"/>
   <p:notesSz cx="6858000" cy="9144000"/>
@@ -3580,7 +3579,7 @@
         <p:spPr>
           <a:xfrm>
             <a:off x="292608" y="1234440"/>
-            <a:ext cx="10515600" cy="3200400"/>
+            <a:ext cx="10515600" cy="3657600"/>
           </a:xfrm>
           <a:prstGeom prst="rect">
             <a:avLst/>
@@ -3602,7 +3601,7 @@
               </a:spcAft>
             </a:pPr>
             <a:r>
-              <a:rPr sz="1500" b="1">
+              <a:rPr sz="1400" b="1">
                 <a:solidFill>
                   <a:srgbClr val="CC0E1E"/>
                 </a:solidFill>
@@ -3611,7 +3610,7 @@
               <a:t>—  </a:t>
             </a:r>
             <a:r>
-              <a:rPr sz="1500">
+              <a:rPr sz="1400">
                 <a:solidFill>
                   <a:srgbClr val="1A1A1A"/>
                 </a:solidFill>
@@ -3630,7 +3629,7 @@
               </a:spcAft>
             </a:pPr>
             <a:r>
-              <a:rPr sz="1500" b="1">
+              <a:rPr sz="1400" b="1">
                 <a:solidFill>
                   <a:srgbClr val="CC0E1E"/>
                 </a:solidFill>
@@ -3639,7 +3638,7 @@
               <a:t>—  </a:t>
             </a:r>
             <a:r>
-              <a:rPr sz="1500">
+              <a:rPr sz="1400">
                 <a:solidFill>
                   <a:srgbClr val="1A1A1A"/>
                 </a:solidFill>
@@ -3658,7 +3657,7 @@
               </a:spcAft>
             </a:pPr>
             <a:r>
-              <a:rPr sz="1500" b="1">
+              <a:rPr sz="1400" b="1">
                 <a:solidFill>
                   <a:srgbClr val="CC0E1E"/>
                 </a:solidFill>
@@ -3667,7 +3666,7 @@
               <a:t>—  </a:t>
             </a:r>
             <a:r>
-              <a:rPr sz="1500">
+              <a:rPr sz="1400">
                 <a:solidFill>
                   <a:srgbClr val="1A1A1A"/>
                 </a:solidFill>
@@ -3686,7 +3685,7 @@
               </a:spcAft>
             </a:pPr>
             <a:r>
-              <a:rPr sz="1500" b="1">
+              <a:rPr sz="1400" b="1">
                 <a:solidFill>
                   <a:srgbClr val="CC0E1E"/>
                 </a:solidFill>
@@ -3695,7 +3694,7 @@
               <a:t>—  </a:t>
             </a:r>
             <a:r>
-              <a:rPr sz="1500">
+              <a:rPr sz="1400">
                 <a:solidFill>
                   <a:srgbClr val="1A1A1A"/>
                 </a:solidFill>
@@ -3829,7 +3828,7 @@
                 </a:solidFill>
                 <a:latin typeface="Calibri"/>
               </a:rPr>
-              <a:t>SERVICE-PARTS COVERAGE</a:t>
+              <a:t>FLEET &amp; FY2027 TARGET</a:t>
             </a:r>
           </a:p>
         </p:txBody>
@@ -3864,7 +3863,7 @@
                 </a:solidFill>
                 <a:latin typeface="Calibri"/>
               </a:rPr>
-              <a:t>Service-parts coverage: brake pad is the clear gap</a:t>
+              <a:t>The fleet is expected to grow in 2026</a:t>
             </a:r>
           </a:p>
         </p:txBody>
@@ -3949,7 +3948,7 @@
       </p:sp>
       <p:pic>
         <p:nvPicPr>
-          <p:cNvPr id="8" name="Picture 7" descr="pms.png"/>
+          <p:cNvPr id="8" name="Picture 7" descr="uio.png"/>
           <p:cNvPicPr>
             <a:picLocks noChangeAspect="1"/>
           </p:cNvPicPr>
@@ -3963,8 +3962,8 @@
         </p:blipFill>
         <p:spPr>
           <a:xfrm>
-            <a:off x="292608" y="2050572"/>
-            <a:ext cx="7178040" cy="3168335"/>
+            <a:off x="292608" y="2121722"/>
+            <a:ext cx="7178040" cy="3026036"/>
           </a:xfrm>
           <a:prstGeom prst="rect">
             <a:avLst/>
@@ -4044,7 +4043,7 @@
                 </a:solidFill>
                 <a:latin typeface="Calibri"/>
               </a:rPr>
-              <a:t>TAKEAWAYS</a:t>
+              <a:t>WHAT THIS MEANS FOR FY2027</a:t>
             </a:r>
           </a:p>
         </p:txBody>
@@ -4095,7 +4094,7 @@
                 </a:solidFill>
                 <a:latin typeface="Calibri"/>
               </a:rPr>
-              <a:t>Brake pad 87.4% against 28.8% for the rest of the network.</a:t>
+              <a:t>Fleet size (calendar year): 2,161 vehicles in 2025 → 2,558 working estimate for end-2026 (+18.4%).</a:t>
             </a:r>
           </a:p>
           <a:p>
@@ -4123,7 +4122,7 @@
                 </a:solidFill>
                 <a:latin typeface="Calibri"/>
               </a:rPr>
-              <a:t>Oil filter 190.6% against 59.0% for the rest of the network.</a:t>
+              <a:t>The chart is calendar years 2019–2026 only. 2026 is a working year-end estimate, not a fiscal-year figure.</a:t>
             </a:r>
           </a:p>
           <a:p>
@@ -4151,7 +4150,7 @@
                 </a:solidFill>
                 <a:latin typeface="Calibri"/>
               </a:rPr>
-              <a:t>Every market here is measured on the same fleet-and-interval model, so the comparison is like-for-like even where the underlying interval assumption is debatable.</a:t>
+              <a:t>Smaller segments not plotted (&lt;5% of fleet): F-Series 83.</a:t>
             </a:r>
           </a:p>
           <a:p>
@@ -4179,7 +4178,35 @@
                 </a:solidFill>
                 <a:latin typeface="Calibri"/>
               </a:rPr>
-              <a:t>Worth agreeing which category we tackle first, and what the joint action is.</a:t>
+              <a:t>The FY2027 Sales-to-Dealer target starts from that fleet change, then applies a 5% price adjustment and 1.8% additional growth.</a:t>
+            </a:r>
+          </a:p>
+          <a:p>
+            <a:pPr>
+              <a:lnSpc>
+                <a:spcPct val="125000"/>
+              </a:lnSpc>
+              <a:spcAft>
+                <a:spcPts val="1000"/>
+              </a:spcAft>
+            </a:pPr>
+            <a:r>
+              <a:rPr sz="1250" b="1">
+                <a:solidFill>
+                  <a:srgbClr val="CC0E1E"/>
+                </a:solidFill>
+                <a:latin typeface="Calibri"/>
+              </a:rPr>
+              <a:t>—  </a:t>
+            </a:r>
+            <a:r>
+              <a:rPr sz="1250">
+                <a:solidFill>
+                  <a:srgbClr val="1A1A1A"/>
+                </a:solidFill>
+                <a:latin typeface="Calibri"/>
+              </a:rPr>
+              <a:t>The target reflects the working fleet outlook without extending the chart beyond 2026.</a:t>
             </a:r>
           </a:p>
         </p:txBody>
@@ -4342,7 +4369,7 @@
                 </a:solidFill>
                 <a:latin typeface="Calibri"/>
               </a:rPr>
-              <a:t>The fleet is expected to grow in 2026</a:t>
+              <a:t>How the FY2027 target is built</a:t>
             </a:r>
           </a:p>
         </p:txBody>
@@ -4421,512 +4448,6 @@
                 <a:latin typeface="Calibri"/>
               </a:rPr>
               <a:t>12</a:t>
-            </a:r>
-          </a:p>
-        </p:txBody>
-      </p:sp>
-      <p:pic>
-        <p:nvPicPr>
-          <p:cNvPr id="8" name="Picture 7" descr="uio.png"/>
-          <p:cNvPicPr>
-            <a:picLocks noChangeAspect="1"/>
-          </p:cNvPicPr>
-          <p:nvPr/>
-        </p:nvPicPr>
-        <p:blipFill>
-          <a:blip r:embed="rId3"/>
-          <a:stretch>
-            <a:fillRect/>
-          </a:stretch>
-        </p:blipFill>
-        <p:spPr>
-          <a:xfrm>
-            <a:off x="292608" y="2120980"/>
-            <a:ext cx="7178040" cy="3027520"/>
-          </a:xfrm>
-          <a:prstGeom prst="rect">
-            <a:avLst/>
-          </a:prstGeom>
-        </p:spPr>
-      </p:pic>
-      <p:sp>
-        <p:nvSpPr>
-          <p:cNvPr id="9" name="Rectangle 8"/>
-          <p:cNvSpPr/>
-          <p:nvPr/>
-        </p:nvSpPr>
-        <p:spPr>
-          <a:xfrm>
-            <a:off x="7726679" y="1188720"/>
-            <a:ext cx="22000" cy="4892040"/>
-          </a:xfrm>
-          <a:prstGeom prst="rect">
-            <a:avLst/>
-          </a:prstGeom>
-          <a:solidFill>
-            <a:srgbClr val="ECECEC"/>
-          </a:solidFill>
-          <a:ln>
-            <a:noFill/>
-          </a:ln>
-        </p:spPr>
-        <p:style>
-          <a:lnRef idx="1">
-            <a:schemeClr val="accent1"/>
-          </a:lnRef>
-          <a:fillRef idx="3">
-            <a:schemeClr val="accent1"/>
-          </a:fillRef>
-          <a:effectRef idx="2">
-            <a:schemeClr val="accent1"/>
-          </a:effectRef>
-          <a:fontRef idx="minor">
-            <a:schemeClr val="lt1"/>
-          </a:fontRef>
-        </p:style>
-        <p:txBody>
-          <a:bodyPr rtlCol="0" anchor="ctr"/>
-          <a:lstStyle/>
-          <a:p>
-            <a:pPr algn="ctr"/>
-          </a:p>
-        </p:txBody>
-      </p:sp>
-      <p:sp>
-        <p:nvSpPr>
-          <p:cNvPr id="10" name="TextBox 9"/>
-          <p:cNvSpPr txBox="1"/>
-          <p:nvPr/>
-        </p:nvSpPr>
-        <p:spPr>
-          <a:xfrm>
-            <a:off x="7927847" y="1234440"/>
-            <a:ext cx="3886200" cy="320040"/>
-          </a:xfrm>
-          <a:prstGeom prst="rect">
-            <a:avLst/>
-          </a:prstGeom>
-          <a:noFill/>
-        </p:spPr>
-        <p:txBody>
-          <a:bodyPr wrap="square">
-            <a:spAutoFit/>
-          </a:bodyPr>
-          <a:lstStyle/>
-          <a:p>
-            <a:pPr algn="l"/>
-            <a:r>
-              <a:rPr sz="1200" b="1">
-                <a:solidFill>
-                  <a:srgbClr val="CC0E1E"/>
-                </a:solidFill>
-                <a:latin typeface="Calibri"/>
-              </a:rPr>
-              <a:t>WHAT THIS MEANS FOR FY2027</a:t>
-            </a:r>
-          </a:p>
-        </p:txBody>
-      </p:sp>
-      <p:sp>
-        <p:nvSpPr>
-          <p:cNvPr id="11" name="TextBox 10"/>
-          <p:cNvSpPr txBox="1"/>
-          <p:nvPr/>
-        </p:nvSpPr>
-        <p:spPr>
-          <a:xfrm>
-            <a:off x="7927847" y="1691640"/>
-            <a:ext cx="3794760" cy="4343400"/>
-          </a:xfrm>
-          <a:prstGeom prst="rect">
-            <a:avLst/>
-          </a:prstGeom>
-          <a:noFill/>
-        </p:spPr>
-        <p:txBody>
-          <a:bodyPr wrap="square">
-            <a:spAutoFit/>
-          </a:bodyPr>
-          <a:lstStyle/>
-          <a:p>
-            <a:pPr>
-              <a:lnSpc>
-                <a:spcPct val="125000"/>
-              </a:lnSpc>
-              <a:spcAft>
-                <a:spcPts val="1000"/>
-              </a:spcAft>
-            </a:pPr>
-            <a:r>
-              <a:rPr sz="1250" b="1">
-                <a:solidFill>
-                  <a:srgbClr val="CC0E1E"/>
-                </a:solidFill>
-                <a:latin typeface="Calibri"/>
-              </a:rPr>
-              <a:t>—  </a:t>
-            </a:r>
-            <a:r>
-              <a:rPr sz="1250">
-                <a:solidFill>
-                  <a:srgbClr val="1A1A1A"/>
-                </a:solidFill>
-                <a:latin typeface="Calibri"/>
-              </a:rPr>
-              <a:t>Fleet size (calendar year): 2,161 vehicles in 2025 → 2,558 working estimate for end-2026 (+18.4%).</a:t>
-            </a:r>
-          </a:p>
-          <a:p>
-            <a:pPr>
-              <a:lnSpc>
-                <a:spcPct val="125000"/>
-              </a:lnSpc>
-              <a:spcAft>
-                <a:spcPts val="1000"/>
-              </a:spcAft>
-            </a:pPr>
-            <a:r>
-              <a:rPr sz="1250" b="1">
-                <a:solidFill>
-                  <a:srgbClr val="CC0E1E"/>
-                </a:solidFill>
-                <a:latin typeface="Calibri"/>
-              </a:rPr>
-              <a:t>—  </a:t>
-            </a:r>
-            <a:r>
-              <a:rPr sz="1250">
-                <a:solidFill>
-                  <a:srgbClr val="1A1A1A"/>
-                </a:solidFill>
-                <a:latin typeface="Calibri"/>
-              </a:rPr>
-              <a:t>The chart is calendar years 2019–2026 only. 2026 is a working year-end estimate, not a fiscal-year figure.</a:t>
-            </a:r>
-          </a:p>
-          <a:p>
-            <a:pPr>
-              <a:lnSpc>
-                <a:spcPct val="125000"/>
-              </a:lnSpc>
-              <a:spcAft>
-                <a:spcPts val="1000"/>
-              </a:spcAft>
-            </a:pPr>
-            <a:r>
-              <a:rPr sz="1250" b="1">
-                <a:solidFill>
-                  <a:srgbClr val="CC0E1E"/>
-                </a:solidFill>
-                <a:latin typeface="Calibri"/>
-              </a:rPr>
-              <a:t>—  </a:t>
-            </a:r>
-            <a:r>
-              <a:rPr sz="1250">
-                <a:solidFill>
-                  <a:srgbClr val="1A1A1A"/>
-                </a:solidFill>
-                <a:latin typeface="Calibri"/>
-              </a:rPr>
-              <a:t>Smaller segments not plotted (&lt;5% of fleet): F-Series 83.</a:t>
-            </a:r>
-          </a:p>
-          <a:p>
-            <a:pPr>
-              <a:lnSpc>
-                <a:spcPct val="125000"/>
-              </a:lnSpc>
-              <a:spcAft>
-                <a:spcPts val="1000"/>
-              </a:spcAft>
-            </a:pPr>
-            <a:r>
-              <a:rPr sz="1250" b="1">
-                <a:solidFill>
-                  <a:srgbClr val="CC0E1E"/>
-                </a:solidFill>
-                <a:latin typeface="Calibri"/>
-              </a:rPr>
-              <a:t>—  </a:t>
-            </a:r>
-            <a:r>
-              <a:rPr sz="1250">
-                <a:solidFill>
-                  <a:srgbClr val="1A1A1A"/>
-                </a:solidFill>
-                <a:latin typeface="Calibri"/>
-              </a:rPr>
-              <a:t>The FY2027 Sales-to-Dealer target starts from that fleet change, then applies a 5% price adjustment and 1.8% additional growth.</a:t>
-            </a:r>
-          </a:p>
-          <a:p>
-            <a:pPr>
-              <a:lnSpc>
-                <a:spcPct val="125000"/>
-              </a:lnSpc>
-              <a:spcAft>
-                <a:spcPts val="1000"/>
-              </a:spcAft>
-            </a:pPr>
-            <a:r>
-              <a:rPr sz="1250" b="1">
-                <a:solidFill>
-                  <a:srgbClr val="CC0E1E"/>
-                </a:solidFill>
-                <a:latin typeface="Calibri"/>
-              </a:rPr>
-              <a:t>—  </a:t>
-            </a:r>
-            <a:r>
-              <a:rPr sz="1250">
-                <a:solidFill>
-                  <a:srgbClr val="1A1A1A"/>
-                </a:solidFill>
-                <a:latin typeface="Calibri"/>
-              </a:rPr>
-              <a:t>The target reflects the working fleet outlook without extending the chart beyond 2026.</a:t>
-            </a:r>
-          </a:p>
-        </p:txBody>
-      </p:sp>
-    </p:spTree>
-  </p:cSld>
-  <p:clrMapOvr>
-    <a:masterClrMapping/>
-  </p:clrMapOvr>
-</p:sld>
-</file>
-
-<file path=ppt/slides/slide13.xml><?xml version="1.0" encoding="utf-8"?>
-<p:sld xmlns:a="http://schemas.openxmlformats.org/drawingml/2006/main" xmlns:p="http://schemas.openxmlformats.org/presentationml/2006/main" xmlns:r="http://schemas.openxmlformats.org/officeDocument/2006/relationships">
-  <p:cSld>
-    <p:bg>
-      <p:bgPr>
-        <a:solidFill>
-          <a:srgbClr val="FFFFFF"/>
-        </a:solidFill>
-        <a:effectLst/>
-      </p:bgPr>
-    </p:bg>
-    <p:spTree>
-      <p:nvGrpSpPr>
-        <p:cNvPr id="1" name=""/>
-        <p:cNvGrpSpPr/>
-        <p:nvPr/>
-      </p:nvGrpSpPr>
-      <p:grpSpPr/>
-      <p:pic>
-        <p:nvPicPr>
-          <p:cNvPr id="2" name="Picture 1" descr="isuzu_logo_red.png"/>
-          <p:cNvPicPr>
-            <a:picLocks noChangeAspect="1"/>
-          </p:cNvPicPr>
-          <p:nvPr/>
-        </p:nvPicPr>
-        <p:blipFill>
-          <a:blip r:embed="rId2"/>
-          <a:stretch>
-            <a:fillRect/>
-          </a:stretch>
-        </p:blipFill>
-        <p:spPr>
-          <a:xfrm>
-            <a:off x="256032" y="6263640"/>
-            <a:ext cx="1679787" cy="292608"/>
-          </a:xfrm>
-          <a:prstGeom prst="rect">
-            <a:avLst/>
-          </a:prstGeom>
-        </p:spPr>
-      </p:pic>
-      <p:sp>
-        <p:nvSpPr>
-          <p:cNvPr id="3" name="Rectangle 2"/>
-          <p:cNvSpPr/>
-          <p:nvPr/>
-        </p:nvSpPr>
-        <p:spPr>
-          <a:xfrm>
-            <a:off x="0" y="6766560"/>
-            <a:ext cx="12188952" cy="91440"/>
-          </a:xfrm>
-          <a:prstGeom prst="rect">
-            <a:avLst/>
-          </a:prstGeom>
-          <a:solidFill>
-            <a:srgbClr val="CC0E1E"/>
-          </a:solidFill>
-          <a:ln>
-            <a:noFill/>
-          </a:ln>
-        </p:spPr>
-        <p:style>
-          <a:lnRef idx="1">
-            <a:schemeClr val="accent1"/>
-          </a:lnRef>
-          <a:fillRef idx="3">
-            <a:schemeClr val="accent1"/>
-          </a:fillRef>
-          <a:effectRef idx="2">
-            <a:schemeClr val="accent1"/>
-          </a:effectRef>
-          <a:fontRef idx="minor">
-            <a:schemeClr val="lt1"/>
-          </a:fontRef>
-        </p:style>
-        <p:txBody>
-          <a:bodyPr rtlCol="0" anchor="ctr"/>
-          <a:lstStyle/>
-          <a:p>
-            <a:pPr algn="ctr"/>
-          </a:p>
-        </p:txBody>
-      </p:sp>
-      <p:sp>
-        <p:nvSpPr>
-          <p:cNvPr id="4" name="TextBox 3"/>
-          <p:cNvSpPr txBox="1"/>
-          <p:nvPr/>
-        </p:nvSpPr>
-        <p:spPr>
-          <a:xfrm>
-            <a:off x="292608" y="201168"/>
-            <a:ext cx="11430000" cy="274320"/>
-          </a:xfrm>
-          <a:prstGeom prst="rect">
-            <a:avLst/>
-          </a:prstGeom>
-          <a:noFill/>
-        </p:spPr>
-        <p:txBody>
-          <a:bodyPr wrap="square">
-            <a:spAutoFit/>
-          </a:bodyPr>
-          <a:lstStyle/>
-          <a:p>
-            <a:pPr algn="l"/>
-            <a:r>
-              <a:rPr sz="1100" b="1">
-                <a:solidFill>
-                  <a:srgbClr val="CC0E1E"/>
-                </a:solidFill>
-                <a:latin typeface="Calibri"/>
-              </a:rPr>
-              <a:t>FLEET &amp; FY2027 TARGET</a:t>
-            </a:r>
-          </a:p>
-        </p:txBody>
-      </p:sp>
-      <p:sp>
-        <p:nvSpPr>
-          <p:cNvPr id="5" name="TextBox 4"/>
-          <p:cNvSpPr txBox="1"/>
-          <p:nvPr/>
-        </p:nvSpPr>
-        <p:spPr>
-          <a:xfrm>
-            <a:off x="292608" y="475488"/>
-            <a:ext cx="11612880" cy="566928"/>
-          </a:xfrm>
-          <a:prstGeom prst="rect">
-            <a:avLst/>
-          </a:prstGeom>
-          <a:noFill/>
-        </p:spPr>
-        <p:txBody>
-          <a:bodyPr wrap="square">
-            <a:spAutoFit/>
-          </a:bodyPr>
-          <a:lstStyle/>
-          <a:p>
-            <a:pPr algn="l"/>
-            <a:r>
-              <a:rPr sz="2500" b="1">
-                <a:solidFill>
-                  <a:srgbClr val="1A1A1A"/>
-                </a:solidFill>
-                <a:latin typeface="Calibri"/>
-              </a:rPr>
-              <a:t>How the FY2027 target is built</a:t>
-            </a:r>
-          </a:p>
-        </p:txBody>
-      </p:sp>
-      <p:sp>
-        <p:nvSpPr>
-          <p:cNvPr id="6" name="Rectangle 5"/>
-          <p:cNvSpPr/>
-          <p:nvPr/>
-        </p:nvSpPr>
-        <p:spPr>
-          <a:xfrm>
-            <a:off x="292608" y="1005840"/>
-            <a:ext cx="11612880" cy="28000"/>
-          </a:xfrm>
-          <a:prstGeom prst="rect">
-            <a:avLst/>
-          </a:prstGeom>
-          <a:solidFill>
-            <a:srgbClr val="CC0E1E"/>
-          </a:solidFill>
-          <a:ln>
-            <a:noFill/>
-          </a:ln>
-        </p:spPr>
-        <p:style>
-          <a:lnRef idx="1">
-            <a:schemeClr val="accent1"/>
-          </a:lnRef>
-          <a:fillRef idx="3">
-            <a:schemeClr val="accent1"/>
-          </a:fillRef>
-          <a:effectRef idx="2">
-            <a:schemeClr val="accent1"/>
-          </a:effectRef>
-          <a:fontRef idx="minor">
-            <a:schemeClr val="lt1"/>
-          </a:fontRef>
-        </p:style>
-        <p:txBody>
-          <a:bodyPr rtlCol="0" anchor="ctr"/>
-          <a:lstStyle/>
-          <a:p>
-            <a:pPr algn="ctr"/>
-          </a:p>
-        </p:txBody>
-      </p:sp>
-      <p:sp>
-        <p:nvSpPr>
-          <p:cNvPr id="7" name="TextBox 6"/>
-          <p:cNvSpPr txBox="1"/>
-          <p:nvPr/>
-        </p:nvSpPr>
-        <p:spPr>
-          <a:xfrm>
-            <a:off x="11594592" y="6473952"/>
-            <a:ext cx="365760" cy="274320"/>
-          </a:xfrm>
-          <a:prstGeom prst="rect">
-            <a:avLst/>
-          </a:prstGeom>
-          <a:noFill/>
-        </p:spPr>
-        <p:txBody>
-          <a:bodyPr wrap="square">
-            <a:spAutoFit/>
-          </a:bodyPr>
-          <a:lstStyle/>
-          <a:p>
-            <a:pPr algn="r"/>
-            <a:r>
-              <a:rPr sz="1000" b="0">
-                <a:solidFill>
-                  <a:srgbClr val="5A5A5A"/>
-                </a:solidFill>
-                <a:latin typeface="Calibri"/>
-              </a:rPr>
-              <a:t>13</a:t>
             </a:r>
           </a:p>
         </p:txBody>
@@ -5050,7 +4571,7 @@
                           </a:solidFill>
                           <a:latin typeface="Calibri"/>
                         </a:rPr>
-                        <a:t>FY2026 Sales-to-Dealer (reported KPI)</a:t>
+                        <a:t>FY2026 Sales-to-Dealer (working estimate)</a:t>
                       </a:r>
                     </a:p>
                   </a:txBody>
@@ -5073,7 +4594,7 @@
                           </a:solidFill>
                           <a:latin typeface="Calibri"/>
                         </a:rPr>
-                        <a:t>EUR 2,833,637</a:t>
+                        <a:t>EUR 1,718,249</a:t>
                       </a:r>
                     </a:p>
                   </a:txBody>
@@ -5121,7 +4642,7 @@
                           </a:solidFill>
                           <a:latin typeface="Calibri"/>
                         </a:rPr>
-                        <a:t>EUR 3,354,208</a:t>
+                        <a:t>EUR 2,033,910</a:t>
                       </a:r>
                     </a:p>
                   </a:txBody>
@@ -5169,7 +4690,7 @@
                           </a:solidFill>
                           <a:latin typeface="Calibri"/>
                         </a:rPr>
-                        <a:t>EUR 3,521,918</a:t>
+                        <a:t>EUR 2,135,606</a:t>
                       </a:r>
                     </a:p>
                   </a:txBody>
@@ -5217,7 +4738,7 @@
                           </a:solidFill>
                           <a:latin typeface="Calibri"/>
                         </a:rPr>
-                        <a:t>EUR 3,585,313</a:t>
+                        <a:t>EUR 2,174,046</a:t>
                       </a:r>
                     </a:p>
                   </a:txBody>
@@ -5306,7 +4827,7 @@
                 </a:solidFill>
                 <a:latin typeface="Calibri"/>
               </a:rPr>
-              <a:t>The FY2026 base is the reported Sales-to-Dealer KPI.</a:t>
+              <a:t>The FY2026 base is a working estimate (ISZE billing ÷ 0.65): the KPI Dashboard has no usable Sales-to-Dealer row for this market.</a:t>
             </a:r>
           </a:p>
         </p:txBody>
@@ -5319,7 +4840,7 @@
 </p:sld>
 </file>
 
-<file path=ppt/slides/slide14.xml><?xml version="1.0" encoding="utf-8"?>
+<file path=ppt/slides/slide13.xml><?xml version="1.0" encoding="utf-8"?>
 <p:sld xmlns:a="http://schemas.openxmlformats.org/drawingml/2006/main" xmlns:p="http://schemas.openxmlformats.org/presentationml/2006/main" xmlns:r="http://schemas.openxmlformats.org/officeDocument/2006/relationships">
   <p:cSld>
     <p:bg>
@@ -5547,7 +5068,7 @@
                 </a:solidFill>
                 <a:latin typeface="Calibri"/>
               </a:rPr>
-              <a:t>14</a:t>
+              <a:t>13</a:t>
             </a:r>
           </a:p>
         </p:txBody>
@@ -6092,7 +5613,7 @@
                           </a:solidFill>
                           <a:latin typeface="Calibri"/>
                         </a:rPr>
-                        <a:t>EUR 3,585,313</a:t>
+                        <a:t>EUR 2,174,046</a:t>
                       </a:r>
                     </a:p>
                   </a:txBody>
@@ -6117,7 +5638,7 @@
                           </a:solidFill>
                           <a:latin typeface="Calibri"/>
                         </a:rPr>
-                        <a:t>vs FY2026 Sales-to-Dealer (EUR 2,833,637)</a:t>
+                        <a:t>vs FY2026 Sales-to-Dealer (EUR 1,718,249)</a:t>
                       </a:r>
                     </a:p>
                   </a:txBody>
@@ -6242,6 +5763,1022 @@
 </p:sld>
 </file>
 
+<file path=ppt/slides/slide14.xml><?xml version="1.0" encoding="utf-8"?>
+<p:sld xmlns:a="http://schemas.openxmlformats.org/drawingml/2006/main" xmlns:p="http://schemas.openxmlformats.org/presentationml/2006/main" xmlns:r="http://schemas.openxmlformats.org/officeDocument/2006/relationships">
+  <p:cSld>
+    <p:bg>
+      <p:bgPr>
+        <a:solidFill>
+          <a:srgbClr val="FFFFFF"/>
+        </a:solidFill>
+        <a:effectLst/>
+      </p:bgPr>
+    </p:bg>
+    <p:spTree>
+      <p:nvGrpSpPr>
+        <p:cNvPr id="1" name=""/>
+        <p:cNvGrpSpPr/>
+        <p:nvPr/>
+      </p:nvGrpSpPr>
+      <p:grpSpPr/>
+      <p:pic>
+        <p:nvPicPr>
+          <p:cNvPr id="2" name="Picture 1" descr="isuzu_logo_red.png"/>
+          <p:cNvPicPr>
+            <a:picLocks noChangeAspect="1"/>
+          </p:cNvPicPr>
+          <p:nvPr/>
+        </p:nvPicPr>
+        <p:blipFill>
+          <a:blip r:embed="rId2"/>
+          <a:stretch>
+            <a:fillRect/>
+          </a:stretch>
+        </p:blipFill>
+        <p:spPr>
+          <a:xfrm>
+            <a:off x="256032" y="6263640"/>
+            <a:ext cx="1679787" cy="292608"/>
+          </a:xfrm>
+          <a:prstGeom prst="rect">
+            <a:avLst/>
+          </a:prstGeom>
+        </p:spPr>
+      </p:pic>
+      <p:sp>
+        <p:nvSpPr>
+          <p:cNvPr id="3" name="Rectangle 2"/>
+          <p:cNvSpPr/>
+          <p:nvPr/>
+        </p:nvSpPr>
+        <p:spPr>
+          <a:xfrm>
+            <a:off x="0" y="6766560"/>
+            <a:ext cx="12188952" cy="91440"/>
+          </a:xfrm>
+          <a:prstGeom prst="rect">
+            <a:avLst/>
+          </a:prstGeom>
+          <a:solidFill>
+            <a:srgbClr val="CC0E1E"/>
+          </a:solidFill>
+          <a:ln>
+            <a:noFill/>
+          </a:ln>
+        </p:spPr>
+        <p:style>
+          <a:lnRef idx="1">
+            <a:schemeClr val="accent1"/>
+          </a:lnRef>
+          <a:fillRef idx="3">
+            <a:schemeClr val="accent1"/>
+          </a:fillRef>
+          <a:effectRef idx="2">
+            <a:schemeClr val="accent1"/>
+          </a:effectRef>
+          <a:fontRef idx="minor">
+            <a:schemeClr val="lt1"/>
+          </a:fontRef>
+        </p:style>
+        <p:txBody>
+          <a:bodyPr rtlCol="0" anchor="ctr"/>
+          <a:lstStyle/>
+          <a:p>
+            <a:pPr algn="ctr"/>
+          </a:p>
+        </p:txBody>
+      </p:sp>
+      <p:sp>
+        <p:nvSpPr>
+          <p:cNvPr id="4" name="TextBox 3"/>
+          <p:cNvSpPr txBox="1"/>
+          <p:nvPr/>
+        </p:nvSpPr>
+        <p:spPr>
+          <a:xfrm>
+            <a:off x="292608" y="201168"/>
+            <a:ext cx="11430000" cy="274320"/>
+          </a:xfrm>
+          <a:prstGeom prst="rect">
+            <a:avLst/>
+          </a:prstGeom>
+          <a:noFill/>
+        </p:spPr>
+        <p:txBody>
+          <a:bodyPr wrap="square">
+            <a:spAutoFit/>
+          </a:bodyPr>
+          <a:lstStyle/>
+          <a:p>
+            <a:pPr algn="l"/>
+            <a:r>
+              <a:rPr sz="1100" b="1">
+                <a:solidFill>
+                  <a:srgbClr val="CC0E1E"/>
+                </a:solidFill>
+                <a:latin typeface="Calibri"/>
+              </a:rPr>
+              <a:t>SPA</a:t>
+            </a:r>
+          </a:p>
+        </p:txBody>
+      </p:sp>
+      <p:sp>
+        <p:nvSpPr>
+          <p:cNvPr id="5" name="TextBox 4"/>
+          <p:cNvSpPr txBox="1"/>
+          <p:nvPr/>
+        </p:nvSpPr>
+        <p:spPr>
+          <a:xfrm>
+            <a:off x="292608" y="475488"/>
+            <a:ext cx="11612880" cy="566928"/>
+          </a:xfrm>
+          <a:prstGeom prst="rect">
+            <a:avLst/>
+          </a:prstGeom>
+          <a:noFill/>
+        </p:spPr>
+        <p:txBody>
+          <a:bodyPr wrap="square">
+            <a:spAutoFit/>
+          </a:bodyPr>
+          <a:lstStyle/>
+          <a:p>
+            <a:pPr algn="l"/>
+            <a:r>
+              <a:rPr sz="2500" b="1">
+                <a:solidFill>
+                  <a:srgbClr val="1A1A1A"/>
+                </a:solidFill>
+                <a:latin typeface="Calibri"/>
+              </a:rPr>
+              <a:t>SPA</a:t>
+            </a:r>
+          </a:p>
+        </p:txBody>
+      </p:sp>
+      <p:sp>
+        <p:nvSpPr>
+          <p:cNvPr id="6" name="Rectangle 5"/>
+          <p:cNvSpPr/>
+          <p:nvPr/>
+        </p:nvSpPr>
+        <p:spPr>
+          <a:xfrm>
+            <a:off x="292608" y="1005840"/>
+            <a:ext cx="11612880" cy="28000"/>
+          </a:xfrm>
+          <a:prstGeom prst="rect">
+            <a:avLst/>
+          </a:prstGeom>
+          <a:solidFill>
+            <a:srgbClr val="CC0E1E"/>
+          </a:solidFill>
+          <a:ln>
+            <a:noFill/>
+          </a:ln>
+        </p:spPr>
+        <p:style>
+          <a:lnRef idx="1">
+            <a:schemeClr val="accent1"/>
+          </a:lnRef>
+          <a:fillRef idx="3">
+            <a:schemeClr val="accent1"/>
+          </a:fillRef>
+          <a:effectRef idx="2">
+            <a:schemeClr val="accent1"/>
+          </a:effectRef>
+          <a:fontRef idx="minor">
+            <a:schemeClr val="lt1"/>
+          </a:fontRef>
+        </p:style>
+        <p:txBody>
+          <a:bodyPr rtlCol="0" anchor="ctr"/>
+          <a:lstStyle/>
+          <a:p>
+            <a:pPr algn="ctr"/>
+          </a:p>
+        </p:txBody>
+      </p:sp>
+      <p:sp>
+        <p:nvSpPr>
+          <p:cNvPr id="7" name="TextBox 6"/>
+          <p:cNvSpPr txBox="1"/>
+          <p:nvPr/>
+        </p:nvSpPr>
+        <p:spPr>
+          <a:xfrm>
+            <a:off x="11594592" y="6473952"/>
+            <a:ext cx="365760" cy="274320"/>
+          </a:xfrm>
+          <a:prstGeom prst="rect">
+            <a:avLst/>
+          </a:prstGeom>
+          <a:noFill/>
+        </p:spPr>
+        <p:txBody>
+          <a:bodyPr wrap="square">
+            <a:spAutoFit/>
+          </a:bodyPr>
+          <a:lstStyle/>
+          <a:p>
+            <a:pPr algn="r"/>
+            <a:r>
+              <a:rPr sz="1000" b="0">
+                <a:solidFill>
+                  <a:srgbClr val="5A5A5A"/>
+                </a:solidFill>
+                <a:latin typeface="Calibri"/>
+              </a:rPr>
+              <a:t>14</a:t>
+            </a:r>
+          </a:p>
+        </p:txBody>
+      </p:sp>
+      <p:sp>
+        <p:nvSpPr>
+          <p:cNvPr id="8" name="Rounded Rectangle 7"/>
+          <p:cNvSpPr/>
+          <p:nvPr/>
+        </p:nvSpPr>
+        <p:spPr>
+          <a:xfrm>
+            <a:off x="292608" y="1234440"/>
+            <a:ext cx="2798064" cy="3108960"/>
+          </a:xfrm>
+          <a:prstGeom prst="roundRect">
+            <a:avLst>
+              <a:gd name="adj" fmla="val 6000"/>
+            </a:avLst>
+          </a:prstGeom>
+          <a:solidFill>
+            <a:srgbClr val="ECECEC"/>
+          </a:solidFill>
+          <a:ln>
+            <a:noFill/>
+          </a:ln>
+          <a:effectLst/>
+        </p:spPr>
+        <p:style>
+          <a:lnRef idx="1">
+            <a:schemeClr val="accent1"/>
+          </a:lnRef>
+          <a:fillRef idx="3">
+            <a:schemeClr val="accent1"/>
+          </a:fillRef>
+          <a:effectRef idx="2">
+            <a:schemeClr val="accent1"/>
+          </a:effectRef>
+          <a:fontRef idx="minor">
+            <a:schemeClr val="lt1"/>
+          </a:fontRef>
+        </p:style>
+        <p:txBody>
+          <a:bodyPr rtlCol="0" anchor="ctr"/>
+          <a:lstStyle/>
+          <a:p>
+            <a:pPr algn="ctr"/>
+          </a:p>
+        </p:txBody>
+      </p:sp>
+      <p:sp>
+        <p:nvSpPr>
+          <p:cNvPr id="9" name="Oval 8"/>
+          <p:cNvSpPr/>
+          <p:nvPr/>
+        </p:nvSpPr>
+        <p:spPr>
+          <a:xfrm>
+            <a:off x="493776" y="1435608"/>
+            <a:ext cx="457200" cy="457200"/>
+          </a:xfrm>
+          <a:prstGeom prst="ellipse">
+            <a:avLst/>
+          </a:prstGeom>
+          <a:solidFill>
+            <a:srgbClr val="CC0E1E"/>
+          </a:solidFill>
+          <a:ln>
+            <a:noFill/>
+          </a:ln>
+          <a:effectLst/>
+        </p:spPr>
+        <p:style>
+          <a:lnRef idx="1">
+            <a:schemeClr val="accent1"/>
+          </a:lnRef>
+          <a:fillRef idx="3">
+            <a:schemeClr val="accent1"/>
+          </a:fillRef>
+          <a:effectRef idx="2">
+            <a:schemeClr val="accent1"/>
+          </a:effectRef>
+          <a:fontRef idx="minor">
+            <a:schemeClr val="lt1"/>
+          </a:fontRef>
+        </p:style>
+        <p:txBody>
+          <a:bodyPr rtlCol="0" anchor="ctr" lIns="0" rIns="0" tIns="0" bIns="0"/>
+          <a:lstStyle/>
+          <a:p>
+            <a:pPr algn="ctr"/>
+            <a:r>
+              <a:rPr sz="1800" b="1">
+                <a:solidFill>
+                  <a:srgbClr val="FFFFFF"/>
+                </a:solidFill>
+                <a:latin typeface="Calibri"/>
+              </a:rPr>
+              <a:t>1</a:t>
+            </a:r>
+          </a:p>
+        </p:txBody>
+      </p:sp>
+      <p:sp>
+        <p:nvSpPr>
+          <p:cNvPr id="10" name="TextBox 9"/>
+          <p:cNvSpPr txBox="1"/>
+          <p:nvPr/>
+        </p:nvSpPr>
+        <p:spPr>
+          <a:xfrm>
+            <a:off x="1115568" y="1435608"/>
+            <a:ext cx="1792224" cy="411480"/>
+          </a:xfrm>
+          <a:prstGeom prst="rect">
+            <a:avLst/>
+          </a:prstGeom>
+          <a:noFill/>
+        </p:spPr>
+        <p:txBody>
+          <a:bodyPr wrap="square">
+            <a:spAutoFit/>
+          </a:bodyPr>
+          <a:lstStyle/>
+          <a:p>
+            <a:pPr algn="l"/>
+            <a:r>
+              <a:rPr sz="1500" b="1">
+                <a:solidFill>
+                  <a:srgbClr val="1A1A1A"/>
+                </a:solidFill>
+                <a:latin typeface="Calibri"/>
+              </a:rPr>
+              <a:t>IRELAND proposal</a:t>
+            </a:r>
+          </a:p>
+        </p:txBody>
+      </p:sp>
+      <p:sp>
+        <p:nvSpPr>
+          <p:cNvPr id="11" name="TextBox 10"/>
+          <p:cNvSpPr txBox="1"/>
+          <p:nvPr/>
+        </p:nvSpPr>
+        <p:spPr>
+          <a:xfrm>
+            <a:off x="585216" y="2011680"/>
+            <a:ext cx="2249424" cy="2194560"/>
+          </a:xfrm>
+          <a:prstGeom prst="rect">
+            <a:avLst/>
+          </a:prstGeom>
+          <a:noFill/>
+        </p:spPr>
+        <p:txBody>
+          <a:bodyPr wrap="square">
+            <a:spAutoFit/>
+          </a:bodyPr>
+          <a:lstStyle/>
+          <a:p>
+            <a:pPr>
+              <a:lnSpc>
+                <a:spcPct val="115000"/>
+              </a:lnSpc>
+              <a:spcAft>
+                <a:spcPts val="1000"/>
+              </a:spcAft>
+            </a:pPr>
+            <a:r>
+              <a:rPr sz="1250" b="1">
+                <a:solidFill>
+                  <a:srgbClr val="CC0E1E"/>
+                </a:solidFill>
+                <a:latin typeface="Calibri"/>
+              </a:rPr>
+              <a:t>—  </a:t>
+            </a:r>
+            <a:r>
+              <a:rPr sz="1250">
+                <a:solidFill>
+                  <a:srgbClr val="1A1A1A"/>
+                </a:solidFill>
+                <a:latin typeface="Calibri"/>
+              </a:rPr>
+              <a:t>Isuzu Ireland submits a proposed parts list.</a:t>
+            </a:r>
+          </a:p>
+        </p:txBody>
+      </p:sp>
+      <p:sp>
+        <p:nvSpPr>
+          <p:cNvPr id="12" name="Rounded Rectangle 11"/>
+          <p:cNvSpPr/>
+          <p:nvPr/>
+        </p:nvSpPr>
+        <p:spPr>
+          <a:xfrm>
+            <a:off x="3227832" y="1234440"/>
+            <a:ext cx="2798064" cy="3108960"/>
+          </a:xfrm>
+          <a:prstGeom prst="roundRect">
+            <a:avLst>
+              <a:gd name="adj" fmla="val 6000"/>
+            </a:avLst>
+          </a:prstGeom>
+          <a:solidFill>
+            <a:srgbClr val="ECECEC"/>
+          </a:solidFill>
+          <a:ln>
+            <a:noFill/>
+          </a:ln>
+          <a:effectLst/>
+        </p:spPr>
+        <p:style>
+          <a:lnRef idx="1">
+            <a:schemeClr val="accent1"/>
+          </a:lnRef>
+          <a:fillRef idx="3">
+            <a:schemeClr val="accent1"/>
+          </a:fillRef>
+          <a:effectRef idx="2">
+            <a:schemeClr val="accent1"/>
+          </a:effectRef>
+          <a:fontRef idx="minor">
+            <a:schemeClr val="lt1"/>
+          </a:fontRef>
+        </p:style>
+        <p:txBody>
+          <a:bodyPr rtlCol="0" anchor="ctr"/>
+          <a:lstStyle/>
+          <a:p>
+            <a:pPr algn="ctr"/>
+          </a:p>
+        </p:txBody>
+      </p:sp>
+      <p:sp>
+        <p:nvSpPr>
+          <p:cNvPr id="13" name="Oval 12"/>
+          <p:cNvSpPr/>
+          <p:nvPr/>
+        </p:nvSpPr>
+        <p:spPr>
+          <a:xfrm>
+            <a:off x="3429000" y="1435608"/>
+            <a:ext cx="457200" cy="457200"/>
+          </a:xfrm>
+          <a:prstGeom prst="ellipse">
+            <a:avLst/>
+          </a:prstGeom>
+          <a:solidFill>
+            <a:srgbClr val="CC0E1E"/>
+          </a:solidFill>
+          <a:ln>
+            <a:noFill/>
+          </a:ln>
+          <a:effectLst/>
+        </p:spPr>
+        <p:style>
+          <a:lnRef idx="1">
+            <a:schemeClr val="accent1"/>
+          </a:lnRef>
+          <a:fillRef idx="3">
+            <a:schemeClr val="accent1"/>
+          </a:fillRef>
+          <a:effectRef idx="2">
+            <a:schemeClr val="accent1"/>
+          </a:effectRef>
+          <a:fontRef idx="minor">
+            <a:schemeClr val="lt1"/>
+          </a:fontRef>
+        </p:style>
+        <p:txBody>
+          <a:bodyPr rtlCol="0" anchor="ctr" lIns="0" rIns="0" tIns="0" bIns="0"/>
+          <a:lstStyle/>
+          <a:p>
+            <a:pPr algn="ctr"/>
+            <a:r>
+              <a:rPr sz="1800" b="1">
+                <a:solidFill>
+                  <a:srgbClr val="FFFFFF"/>
+                </a:solidFill>
+                <a:latin typeface="Calibri"/>
+              </a:rPr>
+              <a:t>2</a:t>
+            </a:r>
+          </a:p>
+        </p:txBody>
+      </p:sp>
+      <p:sp>
+        <p:nvSpPr>
+          <p:cNvPr id="14" name="TextBox 13"/>
+          <p:cNvSpPr txBox="1"/>
+          <p:nvPr/>
+        </p:nvSpPr>
+        <p:spPr>
+          <a:xfrm>
+            <a:off x="4050792" y="1435608"/>
+            <a:ext cx="1792224" cy="411480"/>
+          </a:xfrm>
+          <a:prstGeom prst="rect">
+            <a:avLst/>
+          </a:prstGeom>
+          <a:noFill/>
+        </p:spPr>
+        <p:txBody>
+          <a:bodyPr wrap="square">
+            <a:spAutoFit/>
+          </a:bodyPr>
+          <a:lstStyle/>
+          <a:p>
+            <a:pPr algn="l"/>
+            <a:r>
+              <a:rPr sz="1500" b="1">
+                <a:solidFill>
+                  <a:srgbClr val="1A1A1A"/>
+                </a:solidFill>
+                <a:latin typeface="Calibri"/>
+              </a:rPr>
+              <a:t>ISZE review</a:t>
+            </a:r>
+          </a:p>
+        </p:txBody>
+      </p:sp>
+      <p:sp>
+        <p:nvSpPr>
+          <p:cNvPr id="15" name="TextBox 14"/>
+          <p:cNvSpPr txBox="1"/>
+          <p:nvPr/>
+        </p:nvSpPr>
+        <p:spPr>
+          <a:xfrm>
+            <a:off x="3520440" y="2011680"/>
+            <a:ext cx="2249424" cy="2194560"/>
+          </a:xfrm>
+          <a:prstGeom prst="rect">
+            <a:avLst/>
+          </a:prstGeom>
+          <a:noFill/>
+        </p:spPr>
+        <p:txBody>
+          <a:bodyPr wrap="square">
+            <a:spAutoFit/>
+          </a:bodyPr>
+          <a:lstStyle/>
+          <a:p>
+            <a:pPr>
+              <a:lnSpc>
+                <a:spcPct val="115000"/>
+              </a:lnSpc>
+              <a:spcAft>
+                <a:spcPts val="1000"/>
+              </a:spcAft>
+            </a:pPr>
+            <a:r>
+              <a:rPr sz="1250" b="1">
+                <a:solidFill>
+                  <a:srgbClr val="CC0E1E"/>
+                </a:solidFill>
+                <a:latin typeface="Calibri"/>
+              </a:rPr>
+              <a:t>—  </a:t>
+            </a:r>
+            <a:r>
+              <a:rPr sz="1250">
+                <a:solidFill>
+                  <a:srgbClr val="1A1A1A"/>
+                </a:solidFill>
+                <a:latin typeface="Calibri"/>
+              </a:rPr>
+              <a:t>ISZE reviews the proposal against network data and fit.</a:t>
+            </a:r>
+          </a:p>
+        </p:txBody>
+      </p:sp>
+      <p:sp>
+        <p:nvSpPr>
+          <p:cNvPr id="16" name="Rounded Rectangle 15"/>
+          <p:cNvSpPr/>
+          <p:nvPr/>
+        </p:nvSpPr>
+        <p:spPr>
+          <a:xfrm>
+            <a:off x="6163056" y="1234440"/>
+            <a:ext cx="2798064" cy="3108960"/>
+          </a:xfrm>
+          <a:prstGeom prst="roundRect">
+            <a:avLst>
+              <a:gd name="adj" fmla="val 6000"/>
+            </a:avLst>
+          </a:prstGeom>
+          <a:solidFill>
+            <a:srgbClr val="ECECEC"/>
+          </a:solidFill>
+          <a:ln>
+            <a:noFill/>
+          </a:ln>
+          <a:effectLst/>
+        </p:spPr>
+        <p:style>
+          <a:lnRef idx="1">
+            <a:schemeClr val="accent1"/>
+          </a:lnRef>
+          <a:fillRef idx="3">
+            <a:schemeClr val="accent1"/>
+          </a:fillRef>
+          <a:effectRef idx="2">
+            <a:schemeClr val="accent1"/>
+          </a:effectRef>
+          <a:fontRef idx="minor">
+            <a:schemeClr val="lt1"/>
+          </a:fontRef>
+        </p:style>
+        <p:txBody>
+          <a:bodyPr rtlCol="0" anchor="ctr"/>
+          <a:lstStyle/>
+          <a:p>
+            <a:pPr algn="ctr"/>
+          </a:p>
+        </p:txBody>
+      </p:sp>
+      <p:sp>
+        <p:nvSpPr>
+          <p:cNvPr id="17" name="Oval 16"/>
+          <p:cNvSpPr/>
+          <p:nvPr/>
+        </p:nvSpPr>
+        <p:spPr>
+          <a:xfrm>
+            <a:off x="6364224" y="1435608"/>
+            <a:ext cx="457200" cy="457200"/>
+          </a:xfrm>
+          <a:prstGeom prst="ellipse">
+            <a:avLst/>
+          </a:prstGeom>
+          <a:solidFill>
+            <a:srgbClr val="CC0E1E"/>
+          </a:solidFill>
+          <a:ln>
+            <a:noFill/>
+          </a:ln>
+          <a:effectLst/>
+        </p:spPr>
+        <p:style>
+          <a:lnRef idx="1">
+            <a:schemeClr val="accent1"/>
+          </a:lnRef>
+          <a:fillRef idx="3">
+            <a:schemeClr val="accent1"/>
+          </a:fillRef>
+          <a:effectRef idx="2">
+            <a:schemeClr val="accent1"/>
+          </a:effectRef>
+          <a:fontRef idx="minor">
+            <a:schemeClr val="lt1"/>
+          </a:fontRef>
+        </p:style>
+        <p:txBody>
+          <a:bodyPr rtlCol="0" anchor="ctr" lIns="0" rIns="0" tIns="0" bIns="0"/>
+          <a:lstStyle/>
+          <a:p>
+            <a:pPr algn="ctr"/>
+            <a:r>
+              <a:rPr sz="1800" b="1">
+                <a:solidFill>
+                  <a:srgbClr val="FFFFFF"/>
+                </a:solidFill>
+                <a:latin typeface="Calibri"/>
+              </a:rPr>
+              <a:t>3</a:t>
+            </a:r>
+          </a:p>
+        </p:txBody>
+      </p:sp>
+      <p:sp>
+        <p:nvSpPr>
+          <p:cNvPr id="18" name="TextBox 17"/>
+          <p:cNvSpPr txBox="1"/>
+          <p:nvPr/>
+        </p:nvSpPr>
+        <p:spPr>
+          <a:xfrm>
+            <a:off x="6986016" y="1435608"/>
+            <a:ext cx="1792224" cy="411480"/>
+          </a:xfrm>
+          <a:prstGeom prst="rect">
+            <a:avLst/>
+          </a:prstGeom>
+          <a:noFill/>
+        </p:spPr>
+        <p:txBody>
+          <a:bodyPr wrap="square">
+            <a:spAutoFit/>
+          </a:bodyPr>
+          <a:lstStyle/>
+          <a:p>
+            <a:pPr algn="l"/>
+            <a:r>
+              <a:rPr sz="1500" b="1">
+                <a:solidFill>
+                  <a:srgbClr val="1A1A1A"/>
+                </a:solidFill>
+                <a:latin typeface="Calibri"/>
+              </a:rPr>
+              <a:t>Counter-proposal</a:t>
+            </a:r>
+          </a:p>
+        </p:txBody>
+      </p:sp>
+      <p:sp>
+        <p:nvSpPr>
+          <p:cNvPr id="19" name="TextBox 18"/>
+          <p:cNvSpPr txBox="1"/>
+          <p:nvPr/>
+        </p:nvSpPr>
+        <p:spPr>
+          <a:xfrm>
+            <a:off x="6455664" y="2011680"/>
+            <a:ext cx="2249424" cy="2194560"/>
+          </a:xfrm>
+          <a:prstGeom prst="rect">
+            <a:avLst/>
+          </a:prstGeom>
+          <a:noFill/>
+        </p:spPr>
+        <p:txBody>
+          <a:bodyPr wrap="square">
+            <a:spAutoFit/>
+          </a:bodyPr>
+          <a:lstStyle/>
+          <a:p>
+            <a:pPr>
+              <a:lnSpc>
+                <a:spcPct val="115000"/>
+              </a:lnSpc>
+              <a:spcAft>
+                <a:spcPts val="1000"/>
+              </a:spcAft>
+            </a:pPr>
+            <a:r>
+              <a:rPr sz="1250" b="1">
+                <a:solidFill>
+                  <a:srgbClr val="CC0E1E"/>
+                </a:solidFill>
+                <a:latin typeface="Calibri"/>
+              </a:rPr>
+              <a:t>—  </a:t>
+            </a:r>
+            <a:r>
+              <a:rPr sz="1250">
+                <a:solidFill>
+                  <a:srgbClr val="1A1A1A"/>
+                </a:solidFill>
+                <a:latin typeface="Calibri"/>
+              </a:rPr>
+              <a:t>ISZE returns a counter-proposal where needed.</a:t>
+            </a:r>
+          </a:p>
+        </p:txBody>
+      </p:sp>
+      <p:sp>
+        <p:nvSpPr>
+          <p:cNvPr id="20" name="Rounded Rectangle 19"/>
+          <p:cNvSpPr/>
+          <p:nvPr/>
+        </p:nvSpPr>
+        <p:spPr>
+          <a:xfrm>
+            <a:off x="9098280" y="1234440"/>
+            <a:ext cx="2798064" cy="3108960"/>
+          </a:xfrm>
+          <a:prstGeom prst="roundRect">
+            <a:avLst>
+              <a:gd name="adj" fmla="val 6000"/>
+            </a:avLst>
+          </a:prstGeom>
+          <a:solidFill>
+            <a:srgbClr val="ECECEC"/>
+          </a:solidFill>
+          <a:ln>
+            <a:noFill/>
+          </a:ln>
+          <a:effectLst/>
+        </p:spPr>
+        <p:style>
+          <a:lnRef idx="1">
+            <a:schemeClr val="accent1"/>
+          </a:lnRef>
+          <a:fillRef idx="3">
+            <a:schemeClr val="accent1"/>
+          </a:fillRef>
+          <a:effectRef idx="2">
+            <a:schemeClr val="accent1"/>
+          </a:effectRef>
+          <a:fontRef idx="minor">
+            <a:schemeClr val="lt1"/>
+          </a:fontRef>
+        </p:style>
+        <p:txBody>
+          <a:bodyPr rtlCol="0" anchor="ctr"/>
+          <a:lstStyle/>
+          <a:p>
+            <a:pPr algn="ctr"/>
+          </a:p>
+        </p:txBody>
+      </p:sp>
+      <p:sp>
+        <p:nvSpPr>
+          <p:cNvPr id="21" name="Oval 20"/>
+          <p:cNvSpPr/>
+          <p:nvPr/>
+        </p:nvSpPr>
+        <p:spPr>
+          <a:xfrm>
+            <a:off x="9299448" y="1435608"/>
+            <a:ext cx="457200" cy="457200"/>
+          </a:xfrm>
+          <a:prstGeom prst="ellipse">
+            <a:avLst/>
+          </a:prstGeom>
+          <a:solidFill>
+            <a:srgbClr val="CC0E1E"/>
+          </a:solidFill>
+          <a:ln>
+            <a:noFill/>
+          </a:ln>
+          <a:effectLst/>
+        </p:spPr>
+        <p:style>
+          <a:lnRef idx="1">
+            <a:schemeClr val="accent1"/>
+          </a:lnRef>
+          <a:fillRef idx="3">
+            <a:schemeClr val="accent1"/>
+          </a:fillRef>
+          <a:effectRef idx="2">
+            <a:schemeClr val="accent1"/>
+          </a:effectRef>
+          <a:fontRef idx="minor">
+            <a:schemeClr val="lt1"/>
+          </a:fontRef>
+        </p:style>
+        <p:txBody>
+          <a:bodyPr rtlCol="0" anchor="ctr" lIns="0" rIns="0" tIns="0" bIns="0"/>
+          <a:lstStyle/>
+          <a:p>
+            <a:pPr algn="ctr"/>
+            <a:r>
+              <a:rPr sz="1800" b="1">
+                <a:solidFill>
+                  <a:srgbClr val="FFFFFF"/>
+                </a:solidFill>
+                <a:latin typeface="Calibri"/>
+              </a:rPr>
+              <a:t>4</a:t>
+            </a:r>
+          </a:p>
+        </p:txBody>
+      </p:sp>
+      <p:sp>
+        <p:nvSpPr>
+          <p:cNvPr id="22" name="TextBox 21"/>
+          <p:cNvSpPr txBox="1"/>
+          <p:nvPr/>
+        </p:nvSpPr>
+        <p:spPr>
+          <a:xfrm>
+            <a:off x="9921240" y="1435608"/>
+            <a:ext cx="1792224" cy="411480"/>
+          </a:xfrm>
+          <a:prstGeom prst="rect">
+            <a:avLst/>
+          </a:prstGeom>
+          <a:noFill/>
+        </p:spPr>
+        <p:txBody>
+          <a:bodyPr wrap="square">
+            <a:spAutoFit/>
+          </a:bodyPr>
+          <a:lstStyle/>
+          <a:p>
+            <a:pPr algn="l"/>
+            <a:r>
+              <a:rPr sz="1500" b="1">
+                <a:solidFill>
+                  <a:srgbClr val="1A1A1A"/>
+                </a:solidFill>
+                <a:latin typeface="Calibri"/>
+              </a:rPr>
+              <a:t>Final approval</a:t>
+            </a:r>
+          </a:p>
+        </p:txBody>
+      </p:sp>
+      <p:sp>
+        <p:nvSpPr>
+          <p:cNvPr id="23" name="TextBox 22"/>
+          <p:cNvSpPr txBox="1"/>
+          <p:nvPr/>
+        </p:nvSpPr>
+        <p:spPr>
+          <a:xfrm>
+            <a:off x="9390888" y="2011680"/>
+            <a:ext cx="2249424" cy="2194560"/>
+          </a:xfrm>
+          <a:prstGeom prst="rect">
+            <a:avLst/>
+          </a:prstGeom>
+          <a:noFill/>
+        </p:spPr>
+        <p:txBody>
+          <a:bodyPr wrap="square">
+            <a:spAutoFit/>
+          </a:bodyPr>
+          <a:lstStyle/>
+          <a:p>
+            <a:pPr>
+              <a:lnSpc>
+                <a:spcPct val="115000"/>
+              </a:lnSpc>
+              <a:spcAft>
+                <a:spcPts val="1000"/>
+              </a:spcAft>
+            </a:pPr>
+            <a:r>
+              <a:rPr sz="1250" b="1">
+                <a:solidFill>
+                  <a:srgbClr val="CC0E1E"/>
+                </a:solidFill>
+                <a:latin typeface="Calibri"/>
+              </a:rPr>
+              <a:t>—  </a:t>
+            </a:r>
+            <a:r>
+              <a:rPr sz="1250">
+                <a:solidFill>
+                  <a:srgbClr val="1A1A1A"/>
+                </a:solidFill>
+                <a:latin typeface="Calibri"/>
+              </a:rPr>
+              <a:t>Signed off by ISZE management.</a:t>
+            </a:r>
+          </a:p>
+        </p:txBody>
+      </p:sp>
+      <p:sp>
+        <p:nvSpPr>
+          <p:cNvPr id="24" name="TextBox 23"/>
+          <p:cNvSpPr txBox="1"/>
+          <p:nvPr/>
+        </p:nvSpPr>
+        <p:spPr>
+          <a:xfrm>
+            <a:off x="292608" y="4572000"/>
+            <a:ext cx="8595360" cy="365760"/>
+          </a:xfrm>
+          <a:prstGeom prst="rect">
+            <a:avLst/>
+          </a:prstGeom>
+          <a:noFill/>
+        </p:spPr>
+        <p:txBody>
+          <a:bodyPr wrap="square">
+            <a:spAutoFit/>
+          </a:bodyPr>
+          <a:lstStyle/>
+          <a:p>
+            <a:pPr algn="l"/>
+            <a:r>
+              <a:rPr sz="1400" b="1">
+                <a:solidFill>
+                  <a:srgbClr val="CC0E1E"/>
+                </a:solidFill>
+                <a:latin typeface="Calibri"/>
+              </a:rPr>
+              <a:t>Purpose: higher turnover for both sides.</a:t>
+            </a:r>
+          </a:p>
+        </p:txBody>
+      </p:sp>
+    </p:spTree>
+  </p:cSld>
+  <p:clrMapOvr>
+    <a:masterClrMapping/>
+  </p:clrMapOvr>
+</p:sld>
+</file>
+
 <file path=ppt/slides/slide15.xml><?xml version="1.0" encoding="utf-8"?>
 <p:sld xmlns:a="http://schemas.openxmlformats.org/drawingml/2006/main" xmlns:p="http://schemas.openxmlformats.org/presentationml/2006/main" xmlns:r="http://schemas.openxmlformats.org/officeDocument/2006/relationships">
   <p:cSld>
@@ -6357,7 +6894,7 @@
                 </a:solidFill>
                 <a:latin typeface="Calibri"/>
               </a:rPr>
-              <a:t>SPA</a:t>
+              <a:t>R&amp;M</a:t>
             </a:r>
           </a:p>
         </p:txBody>
@@ -6392,7 +6929,7 @@
                 </a:solidFill>
                 <a:latin typeface="Calibri"/>
               </a:rPr>
-              <a:t>SPA</a:t>
+              <a:t>R&amp;M — let's align on the market</a:t>
             </a:r>
           </a:p>
         </p:txBody>
@@ -6483,8 +7020,8 @@
         </p:nvSpPr>
         <p:spPr>
           <a:xfrm>
-            <a:off x="292608" y="1234440"/>
-            <a:ext cx="2798064" cy="3108960"/>
+            <a:off x="292608" y="1188720"/>
+            <a:ext cx="5486400" cy="4023360"/>
           </a:xfrm>
           <a:prstGeom prst="roundRect">
             <a:avLst>
@@ -6529,7 +7066,7 @@
         </p:nvSpPr>
         <p:spPr>
           <a:xfrm>
-            <a:off x="493776" y="1435608"/>
+            <a:off x="493776" y="1389888"/>
             <a:ext cx="457200" cy="457200"/>
           </a:xfrm>
           <a:prstGeom prst="ellipse">
@@ -6569,7 +7106,7 @@
                 </a:solidFill>
                 <a:latin typeface="Calibri"/>
               </a:rPr>
-              <a:t>1</a:t>
+              <a:t>M</a:t>
             </a:r>
           </a:p>
         </p:txBody>
@@ -6582,8 +7119,8 @@
         </p:nvSpPr>
         <p:spPr>
           <a:xfrm>
-            <a:off x="1115568" y="1435608"/>
-            <a:ext cx="1792224" cy="411480"/>
+            <a:off x="1115568" y="1389888"/>
+            <a:ext cx="4480560" cy="411480"/>
           </a:xfrm>
           <a:prstGeom prst="rect">
             <a:avLst/>
@@ -6604,7 +7141,7 @@
                 </a:solidFill>
                 <a:latin typeface="Calibri"/>
               </a:rPr>
-              <a:t>IRELAND proposal</a:t>
+              <a:t>Market</a:t>
             </a:r>
           </a:p>
         </p:txBody>
@@ -6617,8 +7154,8 @@
         </p:nvSpPr>
         <p:spPr>
           <a:xfrm>
-            <a:off x="585216" y="2011680"/>
-            <a:ext cx="2249424" cy="2194560"/>
+            <a:off x="585216" y="1965960"/>
+            <a:ext cx="4937760" cy="3108960"/>
           </a:xfrm>
           <a:prstGeom prst="rect">
             <a:avLst/>
@@ -6655,166 +7192,9 @@
                 </a:solidFill>
                 <a:latin typeface="Calibri"/>
               </a:rPr>
-              <a:t>Isuzu Ireland submits a proposed parts list.</a:t>
-            </a:r>
-          </a:p>
-        </p:txBody>
-      </p:sp>
-      <p:sp>
-        <p:nvSpPr>
-          <p:cNvPr id="12" name="Rounded Rectangle 11"/>
-          <p:cNvSpPr/>
-          <p:nvPr/>
-        </p:nvSpPr>
-        <p:spPr>
-          <a:xfrm>
-            <a:off x="3227832" y="1234440"/>
-            <a:ext cx="2798064" cy="3108960"/>
-          </a:xfrm>
-          <a:prstGeom prst="roundRect">
-            <a:avLst>
-              <a:gd name="adj" fmla="val 6000"/>
-            </a:avLst>
-          </a:prstGeom>
-          <a:solidFill>
-            <a:srgbClr val="ECECEC"/>
-          </a:solidFill>
-          <a:ln>
-            <a:noFill/>
-          </a:ln>
-          <a:effectLst/>
-        </p:spPr>
-        <p:style>
-          <a:lnRef idx="1">
-            <a:schemeClr val="accent1"/>
-          </a:lnRef>
-          <a:fillRef idx="3">
-            <a:schemeClr val="accent1"/>
-          </a:fillRef>
-          <a:effectRef idx="2">
-            <a:schemeClr val="accent1"/>
-          </a:effectRef>
-          <a:fontRef idx="minor">
-            <a:schemeClr val="lt1"/>
-          </a:fontRef>
-        </p:style>
-        <p:txBody>
-          <a:bodyPr rtlCol="0" anchor="ctr"/>
-          <a:lstStyle/>
-          <a:p>
-            <a:pPr algn="ctr"/>
-          </a:p>
-        </p:txBody>
-      </p:sp>
-      <p:sp>
-        <p:nvSpPr>
-          <p:cNvPr id="13" name="Oval 12"/>
-          <p:cNvSpPr/>
-          <p:nvPr/>
-        </p:nvSpPr>
-        <p:spPr>
-          <a:xfrm>
-            <a:off x="3429000" y="1435608"/>
-            <a:ext cx="457200" cy="457200"/>
-          </a:xfrm>
-          <a:prstGeom prst="ellipse">
-            <a:avLst/>
-          </a:prstGeom>
-          <a:solidFill>
-            <a:srgbClr val="CC0E1E"/>
-          </a:solidFill>
-          <a:ln>
-            <a:noFill/>
-          </a:ln>
-          <a:effectLst/>
-        </p:spPr>
-        <p:style>
-          <a:lnRef idx="1">
-            <a:schemeClr val="accent1"/>
-          </a:lnRef>
-          <a:fillRef idx="3">
-            <a:schemeClr val="accent1"/>
-          </a:fillRef>
-          <a:effectRef idx="2">
-            <a:schemeClr val="accent1"/>
-          </a:effectRef>
-          <a:fontRef idx="minor">
-            <a:schemeClr val="lt1"/>
-          </a:fontRef>
-        </p:style>
-        <p:txBody>
-          <a:bodyPr rtlCol="0" anchor="ctr" lIns="0" rIns="0" tIns="0" bIns="0"/>
-          <a:lstStyle/>
-          <a:p>
-            <a:pPr algn="ctr"/>
-            <a:r>
-              <a:rPr sz="1800" b="1">
-                <a:solidFill>
-                  <a:srgbClr val="FFFFFF"/>
-                </a:solidFill>
-                <a:latin typeface="Calibri"/>
-              </a:rPr>
-              <a:t>2</a:t>
-            </a:r>
-          </a:p>
-        </p:txBody>
-      </p:sp>
-      <p:sp>
-        <p:nvSpPr>
-          <p:cNvPr id="14" name="TextBox 13"/>
-          <p:cNvSpPr txBox="1"/>
-          <p:nvPr/>
-        </p:nvSpPr>
-        <p:spPr>
-          <a:xfrm>
-            <a:off x="4050792" y="1435608"/>
-            <a:ext cx="1792224" cy="411480"/>
-          </a:xfrm>
-          <a:prstGeom prst="rect">
-            <a:avLst/>
-          </a:prstGeom>
-          <a:noFill/>
-        </p:spPr>
-        <p:txBody>
-          <a:bodyPr wrap="square">
-            <a:spAutoFit/>
-          </a:bodyPr>
-          <a:lstStyle/>
-          <a:p>
-            <a:pPr algn="l"/>
-            <a:r>
-              <a:rPr sz="1500" b="1">
-                <a:solidFill>
-                  <a:srgbClr val="1A1A1A"/>
-                </a:solidFill>
-                <a:latin typeface="Calibri"/>
-              </a:rPr>
-              <a:t>ISZE review</a:t>
-            </a:r>
-          </a:p>
-        </p:txBody>
-      </p:sp>
-      <p:sp>
-        <p:nvSpPr>
-          <p:cNvPr id="15" name="TextBox 14"/>
-          <p:cNvSpPr txBox="1"/>
-          <p:nvPr/>
-        </p:nvSpPr>
-        <p:spPr>
-          <a:xfrm>
-            <a:off x="3520440" y="2011680"/>
-            <a:ext cx="2249424" cy="2194560"/>
-          </a:xfrm>
-          <a:prstGeom prst="rect">
-            <a:avLst/>
-          </a:prstGeom>
-          <a:noFill/>
-        </p:spPr>
-        <p:txBody>
-          <a:bodyPr wrap="square">
-            <a:spAutoFit/>
-          </a:bodyPr>
-          <a:lstStyle/>
+              <a:t>How is the market moving for you right now?</a:t>
+            </a:r>
+          </a:p>
           <a:p>
             <a:pPr>
               <a:lnSpc>
@@ -6840,166 +7220,9 @@
                 </a:solidFill>
                 <a:latin typeface="Calibri"/>
               </a:rPr>
-              <a:t>ISZE reviews the proposal against network data and fit.</a:t>
-            </a:r>
-          </a:p>
-        </p:txBody>
-      </p:sp>
-      <p:sp>
-        <p:nvSpPr>
-          <p:cNvPr id="16" name="Rounded Rectangle 15"/>
-          <p:cNvSpPr/>
-          <p:nvPr/>
-        </p:nvSpPr>
-        <p:spPr>
-          <a:xfrm>
-            <a:off x="6163056" y="1234440"/>
-            <a:ext cx="2798064" cy="3108960"/>
-          </a:xfrm>
-          <a:prstGeom prst="roundRect">
-            <a:avLst>
-              <a:gd name="adj" fmla="val 6000"/>
-            </a:avLst>
-          </a:prstGeom>
-          <a:solidFill>
-            <a:srgbClr val="ECECEC"/>
-          </a:solidFill>
-          <a:ln>
-            <a:noFill/>
-          </a:ln>
-          <a:effectLst/>
-        </p:spPr>
-        <p:style>
-          <a:lnRef idx="1">
-            <a:schemeClr val="accent1"/>
-          </a:lnRef>
-          <a:fillRef idx="3">
-            <a:schemeClr val="accent1"/>
-          </a:fillRef>
-          <a:effectRef idx="2">
-            <a:schemeClr val="accent1"/>
-          </a:effectRef>
-          <a:fontRef idx="minor">
-            <a:schemeClr val="lt1"/>
-          </a:fontRef>
-        </p:style>
-        <p:txBody>
-          <a:bodyPr rtlCol="0" anchor="ctr"/>
-          <a:lstStyle/>
-          <a:p>
-            <a:pPr algn="ctr"/>
-          </a:p>
-        </p:txBody>
-      </p:sp>
-      <p:sp>
-        <p:nvSpPr>
-          <p:cNvPr id="17" name="Oval 16"/>
-          <p:cNvSpPr/>
-          <p:nvPr/>
-        </p:nvSpPr>
-        <p:spPr>
-          <a:xfrm>
-            <a:off x="6364224" y="1435608"/>
-            <a:ext cx="457200" cy="457200"/>
-          </a:xfrm>
-          <a:prstGeom prst="ellipse">
-            <a:avLst/>
-          </a:prstGeom>
-          <a:solidFill>
-            <a:srgbClr val="CC0E1E"/>
-          </a:solidFill>
-          <a:ln>
-            <a:noFill/>
-          </a:ln>
-          <a:effectLst/>
-        </p:spPr>
-        <p:style>
-          <a:lnRef idx="1">
-            <a:schemeClr val="accent1"/>
-          </a:lnRef>
-          <a:fillRef idx="3">
-            <a:schemeClr val="accent1"/>
-          </a:fillRef>
-          <a:effectRef idx="2">
-            <a:schemeClr val="accent1"/>
-          </a:effectRef>
-          <a:fontRef idx="minor">
-            <a:schemeClr val="lt1"/>
-          </a:fontRef>
-        </p:style>
-        <p:txBody>
-          <a:bodyPr rtlCol="0" anchor="ctr" lIns="0" rIns="0" tIns="0" bIns="0"/>
-          <a:lstStyle/>
-          <a:p>
-            <a:pPr algn="ctr"/>
-            <a:r>
-              <a:rPr sz="1800" b="1">
-                <a:solidFill>
-                  <a:srgbClr val="FFFFFF"/>
-                </a:solidFill>
-                <a:latin typeface="Calibri"/>
-              </a:rPr>
-              <a:t>3</a:t>
-            </a:r>
-          </a:p>
-        </p:txBody>
-      </p:sp>
-      <p:sp>
-        <p:nvSpPr>
-          <p:cNvPr id="18" name="TextBox 17"/>
-          <p:cNvSpPr txBox="1"/>
-          <p:nvPr/>
-        </p:nvSpPr>
-        <p:spPr>
-          <a:xfrm>
-            <a:off x="6986016" y="1435608"/>
-            <a:ext cx="1792224" cy="411480"/>
-          </a:xfrm>
-          <a:prstGeom prst="rect">
-            <a:avLst/>
-          </a:prstGeom>
-          <a:noFill/>
-        </p:spPr>
-        <p:txBody>
-          <a:bodyPr wrap="square">
-            <a:spAutoFit/>
-          </a:bodyPr>
-          <a:lstStyle/>
-          <a:p>
-            <a:pPr algn="l"/>
-            <a:r>
-              <a:rPr sz="1500" b="1">
-                <a:solidFill>
-                  <a:srgbClr val="1A1A1A"/>
-                </a:solidFill>
-                <a:latin typeface="Calibri"/>
-              </a:rPr>
-              <a:t>Counter-proposal</a:t>
-            </a:r>
-          </a:p>
-        </p:txBody>
-      </p:sp>
-      <p:sp>
-        <p:nvSpPr>
-          <p:cNvPr id="19" name="TextBox 18"/>
-          <p:cNvSpPr txBox="1"/>
-          <p:nvPr/>
-        </p:nvSpPr>
-        <p:spPr>
-          <a:xfrm>
-            <a:off x="6455664" y="2011680"/>
-            <a:ext cx="2249424" cy="2194560"/>
-          </a:xfrm>
-          <a:prstGeom prst="rect">
-            <a:avLst/>
-          </a:prstGeom>
-          <a:noFill/>
-        </p:spPr>
-        <p:txBody>
-          <a:bodyPr wrap="square">
-            <a:spAutoFit/>
-          </a:bodyPr>
-          <a:lstStyle/>
+              <a:t>How much of your volume is fleet business rather than retail?</a:t>
+            </a:r>
+          </a:p>
           <a:p>
             <a:pPr>
               <a:lnSpc>
@@ -7025,166 +7248,9 @@
                 </a:solidFill>
                 <a:latin typeface="Calibri"/>
               </a:rPr>
-              <a:t>ISZE returns a counter-proposal where needed.</a:t>
-            </a:r>
-          </a:p>
-        </p:txBody>
-      </p:sp>
-      <p:sp>
-        <p:nvSpPr>
-          <p:cNvPr id="20" name="Rounded Rectangle 19"/>
-          <p:cNvSpPr/>
-          <p:nvPr/>
-        </p:nvSpPr>
-        <p:spPr>
-          <a:xfrm>
-            <a:off x="9098280" y="1234440"/>
-            <a:ext cx="2798064" cy="3108960"/>
-          </a:xfrm>
-          <a:prstGeom prst="roundRect">
-            <a:avLst>
-              <a:gd name="adj" fmla="val 6000"/>
-            </a:avLst>
-          </a:prstGeom>
-          <a:solidFill>
-            <a:srgbClr val="ECECEC"/>
-          </a:solidFill>
-          <a:ln>
-            <a:noFill/>
-          </a:ln>
-          <a:effectLst/>
-        </p:spPr>
-        <p:style>
-          <a:lnRef idx="1">
-            <a:schemeClr val="accent1"/>
-          </a:lnRef>
-          <a:fillRef idx="3">
-            <a:schemeClr val="accent1"/>
-          </a:fillRef>
-          <a:effectRef idx="2">
-            <a:schemeClr val="accent1"/>
-          </a:effectRef>
-          <a:fontRef idx="minor">
-            <a:schemeClr val="lt1"/>
-          </a:fontRef>
-        </p:style>
-        <p:txBody>
-          <a:bodyPr rtlCol="0" anchor="ctr"/>
-          <a:lstStyle/>
-          <a:p>
-            <a:pPr algn="ctr"/>
-          </a:p>
-        </p:txBody>
-      </p:sp>
-      <p:sp>
-        <p:nvSpPr>
-          <p:cNvPr id="21" name="Oval 20"/>
-          <p:cNvSpPr/>
-          <p:nvPr/>
-        </p:nvSpPr>
-        <p:spPr>
-          <a:xfrm>
-            <a:off x="9299448" y="1435608"/>
-            <a:ext cx="457200" cy="457200"/>
-          </a:xfrm>
-          <a:prstGeom prst="ellipse">
-            <a:avLst/>
-          </a:prstGeom>
-          <a:solidFill>
-            <a:srgbClr val="CC0E1E"/>
-          </a:solidFill>
-          <a:ln>
-            <a:noFill/>
-          </a:ln>
-          <a:effectLst/>
-        </p:spPr>
-        <p:style>
-          <a:lnRef idx="1">
-            <a:schemeClr val="accent1"/>
-          </a:lnRef>
-          <a:fillRef idx="3">
-            <a:schemeClr val="accent1"/>
-          </a:fillRef>
-          <a:effectRef idx="2">
-            <a:schemeClr val="accent1"/>
-          </a:effectRef>
-          <a:fontRef idx="minor">
-            <a:schemeClr val="lt1"/>
-          </a:fontRef>
-        </p:style>
-        <p:txBody>
-          <a:bodyPr rtlCol="0" anchor="ctr" lIns="0" rIns="0" tIns="0" bIns="0"/>
-          <a:lstStyle/>
-          <a:p>
-            <a:pPr algn="ctr"/>
-            <a:r>
-              <a:rPr sz="1800" b="1">
-                <a:solidFill>
-                  <a:srgbClr val="FFFFFF"/>
-                </a:solidFill>
-                <a:latin typeface="Calibri"/>
-              </a:rPr>
-              <a:t>4</a:t>
-            </a:r>
-          </a:p>
-        </p:txBody>
-      </p:sp>
-      <p:sp>
-        <p:nvSpPr>
-          <p:cNvPr id="22" name="TextBox 21"/>
-          <p:cNvSpPr txBox="1"/>
-          <p:nvPr/>
-        </p:nvSpPr>
-        <p:spPr>
-          <a:xfrm>
-            <a:off x="9921240" y="1435608"/>
-            <a:ext cx="1792224" cy="411480"/>
-          </a:xfrm>
-          <a:prstGeom prst="rect">
-            <a:avLst/>
-          </a:prstGeom>
-          <a:noFill/>
-        </p:spPr>
-        <p:txBody>
-          <a:bodyPr wrap="square">
-            <a:spAutoFit/>
-          </a:bodyPr>
-          <a:lstStyle/>
-          <a:p>
-            <a:pPr algn="l"/>
-            <a:r>
-              <a:rPr sz="1500" b="1">
-                <a:solidFill>
-                  <a:srgbClr val="1A1A1A"/>
-                </a:solidFill>
-                <a:latin typeface="Calibri"/>
-              </a:rPr>
-              <a:t>Final approval</a:t>
-            </a:r>
-          </a:p>
-        </p:txBody>
-      </p:sp>
-      <p:sp>
-        <p:nvSpPr>
-          <p:cNvPr id="23" name="TextBox 22"/>
-          <p:cNvSpPr txBox="1"/>
-          <p:nvPr/>
-        </p:nvSpPr>
-        <p:spPr>
-          <a:xfrm>
-            <a:off x="9390888" y="2011680"/>
-            <a:ext cx="2249424" cy="2194560"/>
-          </a:xfrm>
-          <a:prstGeom prst="rect">
-            <a:avLst/>
-          </a:prstGeom>
-          <a:noFill/>
-        </p:spPr>
-        <p:txBody>
-          <a:bodyPr wrap="square">
-            <a:spAutoFit/>
-          </a:bodyPr>
-          <a:lstStyle/>
+              <a:t>Where do you see the biggest hurdles this year?</a:t>
+            </a:r>
+          </a:p>
           <a:p>
             <a:pPr>
               <a:lnSpc>
@@ -7210,21 +7276,120 @@
                 </a:solidFill>
                 <a:latin typeface="Calibri"/>
               </a:rPr>
-              <a:t>Signed off by ISZE management.</a:t>
-            </a:r>
-          </a:p>
-        </p:txBody>
-      </p:sp>
-      <p:sp>
-        <p:nvSpPr>
-          <p:cNvPr id="24" name="TextBox 23"/>
+              <a:t>Where are your real strengths in this segment?</a:t>
+            </a:r>
+          </a:p>
+        </p:txBody>
+      </p:sp>
+      <p:sp>
+        <p:nvSpPr>
+          <p:cNvPr id="12" name="Rounded Rectangle 11"/>
+          <p:cNvSpPr/>
+          <p:nvPr/>
+        </p:nvSpPr>
+        <p:spPr>
+          <a:xfrm>
+            <a:off x="5943600" y="1188720"/>
+            <a:ext cx="5943600" cy="4023360"/>
+          </a:xfrm>
+          <a:prstGeom prst="roundRect">
+            <a:avLst>
+              <a:gd name="adj" fmla="val 6000"/>
+            </a:avLst>
+          </a:prstGeom>
+          <a:solidFill>
+            <a:srgbClr val="ECECEC"/>
+          </a:solidFill>
+          <a:ln>
+            <a:noFill/>
+          </a:ln>
+          <a:effectLst/>
+        </p:spPr>
+        <p:style>
+          <a:lnRef idx="1">
+            <a:schemeClr val="accent1"/>
+          </a:lnRef>
+          <a:fillRef idx="3">
+            <a:schemeClr val="accent1"/>
+          </a:fillRef>
+          <a:effectRef idx="2">
+            <a:schemeClr val="accent1"/>
+          </a:effectRef>
+          <a:fontRef idx="minor">
+            <a:schemeClr val="lt1"/>
+          </a:fontRef>
+        </p:style>
+        <p:txBody>
+          <a:bodyPr rtlCol="0" anchor="ctr"/>
+          <a:lstStyle/>
+          <a:p>
+            <a:pPr algn="ctr"/>
+          </a:p>
+        </p:txBody>
+      </p:sp>
+      <p:sp>
+        <p:nvSpPr>
+          <p:cNvPr id="13" name="Oval 12"/>
+          <p:cNvSpPr/>
+          <p:nvPr/>
+        </p:nvSpPr>
+        <p:spPr>
+          <a:xfrm>
+            <a:off x="6144768" y="1389888"/>
+            <a:ext cx="457200" cy="457200"/>
+          </a:xfrm>
+          <a:prstGeom prst="ellipse">
+            <a:avLst/>
+          </a:prstGeom>
+          <a:solidFill>
+            <a:srgbClr val="CC0E1E"/>
+          </a:solidFill>
+          <a:ln>
+            <a:noFill/>
+          </a:ln>
+          <a:effectLst/>
+        </p:spPr>
+        <p:style>
+          <a:lnRef idx="1">
+            <a:schemeClr val="accent1"/>
+          </a:lnRef>
+          <a:fillRef idx="3">
+            <a:schemeClr val="accent1"/>
+          </a:fillRef>
+          <a:effectRef idx="2">
+            <a:schemeClr val="accent1"/>
+          </a:effectRef>
+          <a:fontRef idx="minor">
+            <a:schemeClr val="lt1"/>
+          </a:fontRef>
+        </p:style>
+        <p:txBody>
+          <a:bodyPr rtlCol="0" anchor="ctr" lIns="0" rIns="0" tIns="0" bIns="0"/>
+          <a:lstStyle/>
+          <a:p>
+            <a:pPr algn="ctr"/>
+            <a:r>
+              <a:rPr sz="1800" b="1">
+                <a:solidFill>
+                  <a:srgbClr val="FFFFFF"/>
+                </a:solidFill>
+                <a:latin typeface="Calibri"/>
+              </a:rPr>
+              <a:t>S</a:t>
+            </a:r>
+          </a:p>
+        </p:txBody>
+      </p:sp>
+      <p:sp>
+        <p:nvSpPr>
+          <p:cNvPr id="14" name="TextBox 13"/>
           <p:cNvSpPr txBox="1"/>
           <p:nvPr/>
         </p:nvSpPr>
         <p:spPr>
           <a:xfrm>
-            <a:off x="292608" y="4572000"/>
-            <a:ext cx="8595360" cy="365760"/>
+            <a:off x="6766560" y="1389888"/>
+            <a:ext cx="4937760" cy="411480"/>
           </a:xfrm>
           <a:prstGeom prst="rect">
             <a:avLst/>
@@ -7239,13 +7404,148 @@
           <a:p>
             <a:pPr algn="l"/>
             <a:r>
-              <a:rPr sz="1400" b="1">
+              <a:rPr sz="1500" b="1">
+                <a:solidFill>
+                  <a:srgbClr val="1A1A1A"/>
+                </a:solidFill>
+                <a:latin typeface="Calibri"/>
+              </a:rPr>
+              <a:t>Servicing &amp; R&amp;M</a:t>
+            </a:r>
+          </a:p>
+        </p:txBody>
+      </p:sp>
+      <p:sp>
+        <p:nvSpPr>
+          <p:cNvPr id="15" name="TextBox 14"/>
+          <p:cNvSpPr txBox="1"/>
+          <p:nvPr/>
+        </p:nvSpPr>
+        <p:spPr>
+          <a:xfrm>
+            <a:off x="6236208" y="1965960"/>
+            <a:ext cx="5394960" cy="3108960"/>
+          </a:xfrm>
+          <a:prstGeom prst="rect">
+            <a:avLst/>
+          </a:prstGeom>
+          <a:noFill/>
+        </p:spPr>
+        <p:txBody>
+          <a:bodyPr wrap="square">
+            <a:spAutoFit/>
+          </a:bodyPr>
+          <a:lstStyle/>
+          <a:p>
+            <a:pPr>
+              <a:lnSpc>
+                <a:spcPct val="115000"/>
+              </a:lnSpc>
+              <a:spcAft>
+                <a:spcPts val="1000"/>
+              </a:spcAft>
+            </a:pPr>
+            <a:r>
+              <a:rPr sz="1250" b="1">
                 <a:solidFill>
                   <a:srgbClr val="CC0E1E"/>
                 </a:solidFill>
                 <a:latin typeface="Calibri"/>
               </a:rPr>
-              <a:t>Purpose: higher turnover for both sides.</a:t>
+              <a:t>—  </a:t>
+            </a:r>
+            <a:r>
+              <a:rPr sz="1250">
+                <a:solidFill>
+                  <a:srgbClr val="1A1A1A"/>
+                </a:solidFill>
+                <a:latin typeface="Calibri"/>
+              </a:rPr>
+              <a:t>Do you offer an R&amp;M or service-plan product today?</a:t>
+            </a:r>
+          </a:p>
+          <a:p>
+            <a:pPr>
+              <a:lnSpc>
+                <a:spcPct val="115000"/>
+              </a:lnSpc>
+              <a:spcAft>
+                <a:spcPts val="1000"/>
+              </a:spcAft>
+            </a:pPr>
+            <a:r>
+              <a:rPr sz="1250" b="1">
+                <a:solidFill>
+                  <a:srgbClr val="CC0E1E"/>
+                </a:solidFill>
+                <a:latin typeface="Calibri"/>
+              </a:rPr>
+              <a:t>—  </a:t>
+            </a:r>
+            <a:r>
+              <a:rPr sz="1250">
+                <a:solidFill>
+                  <a:srgbClr val="1A1A1A"/>
+                </a:solidFill>
+                <a:latin typeface="Calibri"/>
+              </a:rPr>
+              <a:t>What share of the parc do you retain for servicing after year three?</a:t>
+            </a:r>
+          </a:p>
+          <a:p>
+            <a:pPr>
+              <a:lnSpc>
+                <a:spcPct val="115000"/>
+              </a:lnSpc>
+              <a:spcAft>
+                <a:spcPts val="1000"/>
+              </a:spcAft>
+            </a:pPr>
+            <a:r>
+              <a:rPr sz="1250" b="1">
+                <a:solidFill>
+                  <a:srgbClr val="CC0E1E"/>
+                </a:solidFill>
+                <a:latin typeface="Calibri"/>
+              </a:rPr>
+              <a:t>—  </a:t>
+            </a:r>
+            <a:r>
+              <a:rPr sz="1250">
+                <a:solidFill>
+                  <a:srgbClr val="1A1A1A"/>
+                </a:solidFill>
+                <a:latin typeface="Calibri"/>
+              </a:rPr>
+              <a:t>Does R&amp;M business come bundled with fleet tenders — roughly what share?</a:t>
+            </a:r>
+          </a:p>
+          <a:p>
+            <a:pPr>
+              <a:lnSpc>
+                <a:spcPct val="115000"/>
+              </a:lnSpc>
+              <a:spcAft>
+                <a:spcPts val="1000"/>
+              </a:spcAft>
+            </a:pPr>
+            <a:r>
+              <a:rPr sz="1250" b="1">
+                <a:solidFill>
+                  <a:srgbClr val="CC0E1E"/>
+                </a:solidFill>
+                <a:latin typeface="Calibri"/>
+              </a:rPr>
+              <a:t>—  </a:t>
+            </a:r>
+            <a:r>
+              <a:rPr sz="1250">
+                <a:solidFill>
+                  <a:srgbClr val="1A1A1A"/>
+                </a:solidFill>
+                <a:latin typeface="Calibri"/>
+              </a:rPr>
+              <a:t>What would it take to bring more out-of-network servicing back?</a:t>
             </a:r>
           </a:p>
         </p:txBody>
@@ -7373,7 +7673,7 @@
                 </a:solidFill>
                 <a:latin typeface="Calibri"/>
               </a:rPr>
-              <a:t>R&amp;M</a:t>
+              <a:t>ASK</a:t>
             </a:r>
           </a:p>
         </p:txBody>
@@ -7408,7 +7708,7 @@
                 </a:solidFill>
                 <a:latin typeface="Calibri"/>
               </a:rPr>
-              <a:t>R&amp;M — let's align on the market</a:t>
+              <a:t>Part-level Sales-to-Dealer Data</a:t>
             </a:r>
           </a:p>
         </p:txBody>
@@ -7499,8 +7799,8 @@
         </p:nvSpPr>
         <p:spPr>
           <a:xfrm>
-            <a:off x="292608" y="1188720"/>
-            <a:ext cx="5486400" cy="4023360"/>
+            <a:off x="292608" y="1234440"/>
+            <a:ext cx="3611880" cy="2377440"/>
           </a:xfrm>
           <a:prstGeom prst="roundRect">
             <a:avLst>
@@ -7545,7 +7845,7 @@
         </p:nvSpPr>
         <p:spPr>
           <a:xfrm>
-            <a:off x="493776" y="1389888"/>
+            <a:off x="493776" y="1435608"/>
             <a:ext cx="457200" cy="457200"/>
           </a:xfrm>
           <a:prstGeom prst="ellipse">
@@ -7585,7 +7885,7 @@
                 </a:solidFill>
                 <a:latin typeface="Calibri"/>
               </a:rPr>
-              <a:t>M</a:t>
+              <a:t>1</a:t>
             </a:r>
           </a:p>
         </p:txBody>
@@ -7598,8 +7898,8 @@
         </p:nvSpPr>
         <p:spPr>
           <a:xfrm>
-            <a:off x="1115568" y="1389888"/>
-            <a:ext cx="4480560" cy="411480"/>
+            <a:off x="1115568" y="1435608"/>
+            <a:ext cx="2606040" cy="411480"/>
           </a:xfrm>
           <a:prstGeom prst="rect">
             <a:avLst/>
@@ -7620,7 +7920,7 @@
                 </a:solidFill>
                 <a:latin typeface="Calibri"/>
               </a:rPr>
-              <a:t>Market</a:t>
+              <a:t>The starting point</a:t>
             </a:r>
           </a:p>
         </p:txBody>
@@ -7633,8 +7933,8 @@
         </p:nvSpPr>
         <p:spPr>
           <a:xfrm>
-            <a:off x="585216" y="1965960"/>
-            <a:ext cx="4937760" cy="3108960"/>
+            <a:off x="585216" y="2011680"/>
+            <a:ext cx="3063240" cy="1463040"/>
           </a:xfrm>
           <a:prstGeom prst="rect">
             <a:avLst/>
@@ -7671,9 +7971,166 @@
                 </a:solidFill>
                 <a:latin typeface="Calibri"/>
               </a:rPr>
-              <a:t>How is the market moving for you right now?</a:t>
-            </a:r>
-          </a:p>
+              <a:t>We have no Sales-to-Dealer figures from you for FY2026. The ask is monthly Sales-to-Dealer, at part-number level.</a:t>
+            </a:r>
+          </a:p>
+        </p:txBody>
+      </p:sp>
+      <p:sp>
+        <p:nvSpPr>
+          <p:cNvPr id="12" name="Rounded Rectangle 11"/>
+          <p:cNvSpPr/>
+          <p:nvPr/>
+        </p:nvSpPr>
+        <p:spPr>
+          <a:xfrm>
+            <a:off x="4087368" y="1234440"/>
+            <a:ext cx="3611880" cy="2377440"/>
+          </a:xfrm>
+          <a:prstGeom prst="roundRect">
+            <a:avLst>
+              <a:gd name="adj" fmla="val 6000"/>
+            </a:avLst>
+          </a:prstGeom>
+          <a:solidFill>
+            <a:srgbClr val="ECECEC"/>
+          </a:solidFill>
+          <a:ln>
+            <a:noFill/>
+          </a:ln>
+          <a:effectLst/>
+        </p:spPr>
+        <p:style>
+          <a:lnRef idx="1">
+            <a:schemeClr val="accent1"/>
+          </a:lnRef>
+          <a:fillRef idx="3">
+            <a:schemeClr val="accent1"/>
+          </a:fillRef>
+          <a:effectRef idx="2">
+            <a:schemeClr val="accent1"/>
+          </a:effectRef>
+          <a:fontRef idx="minor">
+            <a:schemeClr val="lt1"/>
+          </a:fontRef>
+        </p:style>
+        <p:txBody>
+          <a:bodyPr rtlCol="0" anchor="ctr"/>
+          <a:lstStyle/>
+          <a:p>
+            <a:pPr algn="ctr"/>
+          </a:p>
+        </p:txBody>
+      </p:sp>
+      <p:sp>
+        <p:nvSpPr>
+          <p:cNvPr id="13" name="Oval 12"/>
+          <p:cNvSpPr/>
+          <p:nvPr/>
+        </p:nvSpPr>
+        <p:spPr>
+          <a:xfrm>
+            <a:off x="4288536" y="1435608"/>
+            <a:ext cx="457200" cy="457200"/>
+          </a:xfrm>
+          <a:prstGeom prst="ellipse">
+            <a:avLst/>
+          </a:prstGeom>
+          <a:solidFill>
+            <a:srgbClr val="CC0E1E"/>
+          </a:solidFill>
+          <a:ln>
+            <a:noFill/>
+          </a:ln>
+          <a:effectLst/>
+        </p:spPr>
+        <p:style>
+          <a:lnRef idx="1">
+            <a:schemeClr val="accent1"/>
+          </a:lnRef>
+          <a:fillRef idx="3">
+            <a:schemeClr val="accent1"/>
+          </a:fillRef>
+          <a:effectRef idx="2">
+            <a:schemeClr val="accent1"/>
+          </a:effectRef>
+          <a:fontRef idx="minor">
+            <a:schemeClr val="lt1"/>
+          </a:fontRef>
+        </p:style>
+        <p:txBody>
+          <a:bodyPr rtlCol="0" anchor="ctr" lIns="0" rIns="0" tIns="0" bIns="0"/>
+          <a:lstStyle/>
+          <a:p>
+            <a:pPr algn="ctr"/>
+            <a:r>
+              <a:rPr sz="1800" b="1">
+                <a:solidFill>
+                  <a:srgbClr val="FFFFFF"/>
+                </a:solidFill>
+                <a:latin typeface="Calibri"/>
+              </a:rPr>
+              <a:t>2</a:t>
+            </a:r>
+          </a:p>
+        </p:txBody>
+      </p:sp>
+      <p:sp>
+        <p:nvSpPr>
+          <p:cNvPr id="14" name="TextBox 13"/>
+          <p:cNvSpPr txBox="1"/>
+          <p:nvPr/>
+        </p:nvSpPr>
+        <p:spPr>
+          <a:xfrm>
+            <a:off x="4910328" y="1435608"/>
+            <a:ext cx="2606040" cy="411480"/>
+          </a:xfrm>
+          <a:prstGeom prst="rect">
+            <a:avLst/>
+          </a:prstGeom>
+          <a:noFill/>
+        </p:spPr>
+        <p:txBody>
+          <a:bodyPr wrap="square">
+            <a:spAutoFit/>
+          </a:bodyPr>
+          <a:lstStyle/>
+          <a:p>
+            <a:pPr algn="l"/>
+            <a:r>
+              <a:rPr sz="1500" b="1">
+                <a:solidFill>
+                  <a:srgbClr val="1A1A1A"/>
+                </a:solidFill>
+                <a:latin typeface="Calibri"/>
+              </a:rPr>
+              <a:t>Sharper insight</a:t>
+            </a:r>
+          </a:p>
+        </p:txBody>
+      </p:sp>
+      <p:sp>
+        <p:nvSpPr>
+          <p:cNvPr id="15" name="TextBox 14"/>
+          <p:cNvSpPr txBox="1"/>
+          <p:nvPr/>
+        </p:nvSpPr>
+        <p:spPr>
+          <a:xfrm>
+            <a:off x="4379976" y="2011680"/>
+            <a:ext cx="3063240" cy="1463040"/>
+          </a:xfrm>
+          <a:prstGeom prst="rect">
+            <a:avLst/>
+          </a:prstGeom>
+          <a:noFill/>
+        </p:spPr>
+        <p:txBody>
+          <a:bodyPr wrap="square">
+            <a:spAutoFit/>
+          </a:bodyPr>
+          <a:lstStyle/>
           <a:p>
             <a:pPr>
               <a:lnSpc>
@@ -7699,9 +8156,166 @@
                 </a:solidFill>
                 <a:latin typeface="Calibri"/>
               </a:rPr>
-              <a:t>How much of your volume is fleet business rather than retail?</a:t>
-            </a:r>
-          </a:p>
+              <a:t>Part-by-part visibility separates a stock movement from a lost job — and tells us where the volume actually went.</a:t>
+            </a:r>
+          </a:p>
+        </p:txBody>
+      </p:sp>
+      <p:sp>
+        <p:nvSpPr>
+          <p:cNvPr id="16" name="Rounded Rectangle 15"/>
+          <p:cNvSpPr/>
+          <p:nvPr/>
+        </p:nvSpPr>
+        <p:spPr>
+          <a:xfrm>
+            <a:off x="7882127" y="1234440"/>
+            <a:ext cx="3611880" cy="2377440"/>
+          </a:xfrm>
+          <a:prstGeom prst="roundRect">
+            <a:avLst>
+              <a:gd name="adj" fmla="val 6000"/>
+            </a:avLst>
+          </a:prstGeom>
+          <a:solidFill>
+            <a:srgbClr val="ECECEC"/>
+          </a:solidFill>
+          <a:ln>
+            <a:noFill/>
+          </a:ln>
+          <a:effectLst/>
+        </p:spPr>
+        <p:style>
+          <a:lnRef idx="1">
+            <a:schemeClr val="accent1"/>
+          </a:lnRef>
+          <a:fillRef idx="3">
+            <a:schemeClr val="accent1"/>
+          </a:fillRef>
+          <a:effectRef idx="2">
+            <a:schemeClr val="accent1"/>
+          </a:effectRef>
+          <a:fontRef idx="minor">
+            <a:schemeClr val="lt1"/>
+          </a:fontRef>
+        </p:style>
+        <p:txBody>
+          <a:bodyPr rtlCol="0" anchor="ctr"/>
+          <a:lstStyle/>
+          <a:p>
+            <a:pPr algn="ctr"/>
+          </a:p>
+        </p:txBody>
+      </p:sp>
+      <p:sp>
+        <p:nvSpPr>
+          <p:cNvPr id="17" name="Oval 16"/>
+          <p:cNvSpPr/>
+          <p:nvPr/>
+        </p:nvSpPr>
+        <p:spPr>
+          <a:xfrm>
+            <a:off x="8083295" y="1435608"/>
+            <a:ext cx="457200" cy="457200"/>
+          </a:xfrm>
+          <a:prstGeom prst="ellipse">
+            <a:avLst/>
+          </a:prstGeom>
+          <a:solidFill>
+            <a:srgbClr val="CC0E1E"/>
+          </a:solidFill>
+          <a:ln>
+            <a:noFill/>
+          </a:ln>
+          <a:effectLst/>
+        </p:spPr>
+        <p:style>
+          <a:lnRef idx="1">
+            <a:schemeClr val="accent1"/>
+          </a:lnRef>
+          <a:fillRef idx="3">
+            <a:schemeClr val="accent1"/>
+          </a:fillRef>
+          <a:effectRef idx="2">
+            <a:schemeClr val="accent1"/>
+          </a:effectRef>
+          <a:fontRef idx="minor">
+            <a:schemeClr val="lt1"/>
+          </a:fontRef>
+        </p:style>
+        <p:txBody>
+          <a:bodyPr rtlCol="0" anchor="ctr" lIns="0" rIns="0" tIns="0" bIns="0"/>
+          <a:lstStyle/>
+          <a:p>
+            <a:pPr algn="ctr"/>
+            <a:r>
+              <a:rPr sz="1800" b="1">
+                <a:solidFill>
+                  <a:srgbClr val="FFFFFF"/>
+                </a:solidFill>
+                <a:latin typeface="Calibri"/>
+              </a:rPr>
+              <a:t>3</a:t>
+            </a:r>
+          </a:p>
+        </p:txBody>
+      </p:sp>
+      <p:sp>
+        <p:nvSpPr>
+          <p:cNvPr id="18" name="TextBox 17"/>
+          <p:cNvSpPr txBox="1"/>
+          <p:nvPr/>
+        </p:nvSpPr>
+        <p:spPr>
+          <a:xfrm>
+            <a:off x="8705087" y="1435608"/>
+            <a:ext cx="2606040" cy="411480"/>
+          </a:xfrm>
+          <a:prstGeom prst="rect">
+            <a:avLst/>
+          </a:prstGeom>
+          <a:noFill/>
+        </p:spPr>
+        <p:txBody>
+          <a:bodyPr wrap="square">
+            <a:spAutoFit/>
+          </a:bodyPr>
+          <a:lstStyle/>
+          <a:p>
+            <a:pPr algn="l"/>
+            <a:r>
+              <a:rPr sz="1500" b="1">
+                <a:solidFill>
+                  <a:srgbClr val="1A1A1A"/>
+                </a:solidFill>
+                <a:latin typeface="Calibri"/>
+              </a:rPr>
+              <a:t>Shared benefit</a:t>
+            </a:r>
+          </a:p>
+        </p:txBody>
+      </p:sp>
+      <p:sp>
+        <p:nvSpPr>
+          <p:cNvPr id="19" name="TextBox 18"/>
+          <p:cNvSpPr txBox="1"/>
+          <p:nvPr/>
+        </p:nvSpPr>
+        <p:spPr>
+          <a:xfrm>
+            <a:off x="8174735" y="2011680"/>
+            <a:ext cx="3063240" cy="1463040"/>
+          </a:xfrm>
+          <a:prstGeom prst="rect">
+            <a:avLst/>
+          </a:prstGeom>
+          <a:noFill/>
+        </p:spPr>
+        <p:txBody>
+          <a:bodyPr wrap="square">
+            <a:spAutoFit/>
+          </a:bodyPr>
+          <a:lstStyle/>
           <a:p>
             <a:pPr>
               <a:lnSpc>
@@ -7727,148 +8341,21 @@
                 </a:solidFill>
                 <a:latin typeface="Calibri"/>
               </a:rPr>
-              <a:t>Where do you see the biggest hurdles this year?</a:t>
-            </a:r>
-          </a:p>
-          <a:p>
-            <a:pPr>
-              <a:lnSpc>
-                <a:spcPct val="115000"/>
-              </a:lnSpc>
-              <a:spcAft>
-                <a:spcPts val="1000"/>
-              </a:spcAft>
-            </a:pPr>
-            <a:r>
-              <a:rPr sz="1250" b="1">
-                <a:solidFill>
-                  <a:srgbClr val="CC0E1E"/>
-                </a:solidFill>
-                <a:latin typeface="Calibri"/>
-              </a:rPr>
-              <a:t>—  </a:t>
-            </a:r>
-            <a:r>
-              <a:rPr sz="1250">
-                <a:solidFill>
-                  <a:srgbClr val="1A1A1A"/>
-                </a:solidFill>
-                <a:latin typeface="Calibri"/>
-              </a:rPr>
-              <a:t>Where are your real strengths in this segment?</a:t>
-            </a:r>
-          </a:p>
-        </p:txBody>
-      </p:sp>
-      <p:sp>
-        <p:nvSpPr>
-          <p:cNvPr id="12" name="Rounded Rectangle 11"/>
-          <p:cNvSpPr/>
-          <p:nvPr/>
-        </p:nvSpPr>
-        <p:spPr>
-          <a:xfrm>
-            <a:off x="5943600" y="1188720"/>
-            <a:ext cx="5943600" cy="4023360"/>
-          </a:xfrm>
-          <a:prstGeom prst="roundRect">
-            <a:avLst>
-              <a:gd name="adj" fmla="val 6000"/>
-            </a:avLst>
-          </a:prstGeom>
-          <a:solidFill>
-            <a:srgbClr val="ECECEC"/>
-          </a:solidFill>
-          <a:ln>
-            <a:noFill/>
-          </a:ln>
-          <a:effectLst/>
-        </p:spPr>
-        <p:style>
-          <a:lnRef idx="1">
-            <a:schemeClr val="accent1"/>
-          </a:lnRef>
-          <a:fillRef idx="3">
-            <a:schemeClr val="accent1"/>
-          </a:fillRef>
-          <a:effectRef idx="2">
-            <a:schemeClr val="accent1"/>
-          </a:effectRef>
-          <a:fontRef idx="minor">
-            <a:schemeClr val="lt1"/>
-          </a:fontRef>
-        </p:style>
-        <p:txBody>
-          <a:bodyPr rtlCol="0" anchor="ctr"/>
-          <a:lstStyle/>
-          <a:p>
-            <a:pPr algn="ctr"/>
-          </a:p>
-        </p:txBody>
-      </p:sp>
-      <p:sp>
-        <p:nvSpPr>
-          <p:cNvPr id="13" name="Oval 12"/>
-          <p:cNvSpPr/>
-          <p:nvPr/>
-        </p:nvSpPr>
-        <p:spPr>
-          <a:xfrm>
-            <a:off x="6144768" y="1389888"/>
-            <a:ext cx="457200" cy="457200"/>
-          </a:xfrm>
-          <a:prstGeom prst="ellipse">
-            <a:avLst/>
-          </a:prstGeom>
-          <a:solidFill>
-            <a:srgbClr val="CC0E1E"/>
-          </a:solidFill>
-          <a:ln>
-            <a:noFill/>
-          </a:ln>
-          <a:effectLst/>
-        </p:spPr>
-        <p:style>
-          <a:lnRef idx="1">
-            <a:schemeClr val="accent1"/>
-          </a:lnRef>
-          <a:fillRef idx="3">
-            <a:schemeClr val="accent1"/>
-          </a:fillRef>
-          <a:effectRef idx="2">
-            <a:schemeClr val="accent1"/>
-          </a:effectRef>
-          <a:fontRef idx="minor">
-            <a:schemeClr val="lt1"/>
-          </a:fontRef>
-        </p:style>
-        <p:txBody>
-          <a:bodyPr rtlCol="0" anchor="ctr" lIns="0" rIns="0" tIns="0" bIns="0"/>
-          <a:lstStyle/>
-          <a:p>
-            <a:pPr algn="ctr"/>
-            <a:r>
-              <a:rPr sz="1800" b="1">
-                <a:solidFill>
-                  <a:srgbClr val="FFFFFF"/>
-                </a:solidFill>
-                <a:latin typeface="Calibri"/>
-              </a:rPr>
-              <a:t>S</a:t>
-            </a:r>
-          </a:p>
-        </p:txBody>
-      </p:sp>
-      <p:sp>
-        <p:nvSpPr>
-          <p:cNvPr id="14" name="TextBox 13"/>
+              <a:t>Better availability on your fast movers, a sharper target for us, and a factual basis for the SPA — same data, both sides gain.</a:t>
+            </a:r>
+          </a:p>
+        </p:txBody>
+      </p:sp>
+      <p:sp>
+        <p:nvSpPr>
+          <p:cNvPr id="20" name="TextBox 19"/>
           <p:cNvSpPr txBox="1"/>
           <p:nvPr/>
         </p:nvSpPr>
         <p:spPr>
           <a:xfrm>
-            <a:off x="6766560" y="1389888"/>
-            <a:ext cx="4937760" cy="411480"/>
+            <a:off x="292608" y="3886200"/>
+            <a:ext cx="8595360" cy="365760"/>
           </a:xfrm>
           <a:prstGeom prst="rect">
             <a:avLst/>
@@ -7883,148 +8370,13 @@
           <a:p>
             <a:pPr algn="l"/>
             <a:r>
-              <a:rPr sz="1500" b="1">
-                <a:solidFill>
-                  <a:srgbClr val="1A1A1A"/>
-                </a:solidFill>
-                <a:latin typeface="Calibri"/>
-              </a:rPr>
-              <a:t>Servicing &amp; R&amp;M</a:t>
-            </a:r>
-          </a:p>
-        </p:txBody>
-      </p:sp>
-      <p:sp>
-        <p:nvSpPr>
-          <p:cNvPr id="15" name="TextBox 14"/>
-          <p:cNvSpPr txBox="1"/>
-          <p:nvPr/>
-        </p:nvSpPr>
-        <p:spPr>
-          <a:xfrm>
-            <a:off x="6236208" y="1965960"/>
-            <a:ext cx="5394960" cy="3108960"/>
-          </a:xfrm>
-          <a:prstGeom prst="rect">
-            <a:avLst/>
-          </a:prstGeom>
-          <a:noFill/>
-        </p:spPr>
-        <p:txBody>
-          <a:bodyPr wrap="square">
-            <a:spAutoFit/>
-          </a:bodyPr>
-          <a:lstStyle/>
-          <a:p>
-            <a:pPr>
-              <a:lnSpc>
-                <a:spcPct val="115000"/>
-              </a:lnSpc>
-              <a:spcAft>
-                <a:spcPts val="1000"/>
-              </a:spcAft>
-            </a:pPr>
-            <a:r>
-              <a:rPr sz="1250" b="1">
+              <a:rPr sz="1400" b="1">
                 <a:solidFill>
                   <a:srgbClr val="CC0E1E"/>
                 </a:solidFill>
                 <a:latin typeface="Calibri"/>
               </a:rPr>
-              <a:t>—  </a:t>
-            </a:r>
-            <a:r>
-              <a:rPr sz="1250">
-                <a:solidFill>
-                  <a:srgbClr val="1A1A1A"/>
-                </a:solidFill>
-                <a:latin typeface="Calibri"/>
-              </a:rPr>
-              <a:t>Do you offer an R&amp;M or service-plan product today?</a:t>
-            </a:r>
-          </a:p>
-          <a:p>
-            <a:pPr>
-              <a:lnSpc>
-                <a:spcPct val="115000"/>
-              </a:lnSpc>
-              <a:spcAft>
-                <a:spcPts val="1000"/>
-              </a:spcAft>
-            </a:pPr>
-            <a:r>
-              <a:rPr sz="1250" b="1">
-                <a:solidFill>
-                  <a:srgbClr val="CC0E1E"/>
-                </a:solidFill>
-                <a:latin typeface="Calibri"/>
-              </a:rPr>
-              <a:t>—  </a:t>
-            </a:r>
-            <a:r>
-              <a:rPr sz="1250">
-                <a:solidFill>
-                  <a:srgbClr val="1A1A1A"/>
-                </a:solidFill>
-                <a:latin typeface="Calibri"/>
-              </a:rPr>
-              <a:t>What share of the parc do you retain for servicing after year three?</a:t>
-            </a:r>
-          </a:p>
-          <a:p>
-            <a:pPr>
-              <a:lnSpc>
-                <a:spcPct val="115000"/>
-              </a:lnSpc>
-              <a:spcAft>
-                <a:spcPts val="1000"/>
-              </a:spcAft>
-            </a:pPr>
-            <a:r>
-              <a:rPr sz="1250" b="1">
-                <a:solidFill>
-                  <a:srgbClr val="CC0E1E"/>
-                </a:solidFill>
-                <a:latin typeface="Calibri"/>
-              </a:rPr>
-              <a:t>—  </a:t>
-            </a:r>
-            <a:r>
-              <a:rPr sz="1250">
-                <a:solidFill>
-                  <a:srgbClr val="1A1A1A"/>
-                </a:solidFill>
-                <a:latin typeface="Calibri"/>
-              </a:rPr>
-              <a:t>Does R&amp;M business come bundled with fleet tenders — roughly what share?</a:t>
-            </a:r>
-          </a:p>
-          <a:p>
-            <a:pPr>
-              <a:lnSpc>
-                <a:spcPct val="115000"/>
-              </a:lnSpc>
-              <a:spcAft>
-                <a:spcPts val="1000"/>
-              </a:spcAft>
-            </a:pPr>
-            <a:r>
-              <a:rPr sz="1250" b="1">
-                <a:solidFill>
-                  <a:srgbClr val="CC0E1E"/>
-                </a:solidFill>
-                <a:latin typeface="Calibri"/>
-              </a:rPr>
-              <a:t>—  </a:t>
-            </a:r>
-            <a:r>
-              <a:rPr sz="1250">
-                <a:solidFill>
-                  <a:srgbClr val="1A1A1A"/>
-                </a:solidFill>
-                <a:latin typeface="Calibri"/>
-              </a:rPr>
-              <a:t>What would it take to bring more out-of-network servicing back?</a:t>
+              <a:t>Requested from 01/01/2025, part number level, monthly.</a:t>
             </a:r>
           </a:p>
         </p:txBody>
@@ -8152,7 +8504,7 @@
                 </a:solidFill>
                 <a:latin typeface="Calibri"/>
               </a:rPr>
-              <a:t>ASK</a:t>
+              <a:t>SUMMARY</a:t>
             </a:r>
           </a:p>
         </p:txBody>
@@ -8187,7 +8539,7 @@
                 </a:solidFill>
                 <a:latin typeface="Calibri"/>
               </a:rPr>
-              <a:t>Part-level Sales-to-Dealer Data</a:t>
+              <a:t>Next steps</a:t>
             </a:r>
           </a:p>
         </p:txBody>
@@ -8272,113 +8624,14 @@
       </p:sp>
       <p:sp>
         <p:nvSpPr>
-          <p:cNvPr id="8" name="Rounded Rectangle 7"/>
-          <p:cNvSpPr/>
+          <p:cNvPr id="8" name="TextBox 7"/>
+          <p:cNvSpPr txBox="1"/>
           <p:nvPr/>
         </p:nvSpPr>
         <p:spPr>
           <a:xfrm>
             <a:off x="292608" y="1234440"/>
-            <a:ext cx="3611880" cy="2377440"/>
-          </a:xfrm>
-          <a:prstGeom prst="roundRect">
-            <a:avLst>
-              <a:gd name="adj" fmla="val 6000"/>
-            </a:avLst>
-          </a:prstGeom>
-          <a:solidFill>
-            <a:srgbClr val="ECECEC"/>
-          </a:solidFill>
-          <a:ln>
-            <a:noFill/>
-          </a:ln>
-          <a:effectLst/>
-        </p:spPr>
-        <p:style>
-          <a:lnRef idx="1">
-            <a:schemeClr val="accent1"/>
-          </a:lnRef>
-          <a:fillRef idx="3">
-            <a:schemeClr val="accent1"/>
-          </a:fillRef>
-          <a:effectRef idx="2">
-            <a:schemeClr val="accent1"/>
-          </a:effectRef>
-          <a:fontRef idx="minor">
-            <a:schemeClr val="lt1"/>
-          </a:fontRef>
-        </p:style>
-        <p:txBody>
-          <a:bodyPr rtlCol="0" anchor="ctr"/>
-          <a:lstStyle/>
-          <a:p>
-            <a:pPr algn="ctr"/>
-          </a:p>
-        </p:txBody>
-      </p:sp>
-      <p:sp>
-        <p:nvSpPr>
-          <p:cNvPr id="9" name="Oval 8"/>
-          <p:cNvSpPr/>
-          <p:nvPr/>
-        </p:nvSpPr>
-        <p:spPr>
-          <a:xfrm>
-            <a:off x="493776" y="1435608"/>
-            <a:ext cx="457200" cy="457200"/>
-          </a:xfrm>
-          <a:prstGeom prst="ellipse">
-            <a:avLst/>
-          </a:prstGeom>
-          <a:solidFill>
-            <a:srgbClr val="CC0E1E"/>
-          </a:solidFill>
-          <a:ln>
-            <a:noFill/>
-          </a:ln>
-          <a:effectLst/>
-        </p:spPr>
-        <p:style>
-          <a:lnRef idx="1">
-            <a:schemeClr val="accent1"/>
-          </a:lnRef>
-          <a:fillRef idx="3">
-            <a:schemeClr val="accent1"/>
-          </a:fillRef>
-          <a:effectRef idx="2">
-            <a:schemeClr val="accent1"/>
-          </a:effectRef>
-          <a:fontRef idx="minor">
-            <a:schemeClr val="lt1"/>
-          </a:fontRef>
-        </p:style>
-        <p:txBody>
-          <a:bodyPr rtlCol="0" anchor="ctr" lIns="0" rIns="0" tIns="0" bIns="0"/>
-          <a:lstStyle/>
-          <a:p>
-            <a:pPr algn="ctr"/>
-            <a:r>
-              <a:rPr sz="1800" b="1">
-                <a:solidFill>
-                  <a:srgbClr val="FFFFFF"/>
-                </a:solidFill>
-                <a:latin typeface="Calibri"/>
-              </a:rPr>
-              <a:t>1</a:t>
-            </a:r>
-          </a:p>
-        </p:txBody>
-      </p:sp>
-      <p:sp>
-        <p:nvSpPr>
-          <p:cNvPr id="10" name="TextBox 9"/>
-          <p:cNvSpPr txBox="1"/>
-          <p:nvPr/>
-        </p:nvSpPr>
-        <p:spPr>
-          <a:xfrm>
-            <a:off x="1115568" y="1435608"/>
-            <a:ext cx="2606040" cy="411480"/>
+            <a:ext cx="11612880" cy="4206240"/>
           </a:xfrm>
           <a:prstGeom prst="rect">
             <a:avLst/>
@@ -8391,51 +8644,16 @@
           </a:bodyPr>
           <a:lstStyle/>
           <a:p>
-            <a:pPr algn="l"/>
-            <a:r>
-              <a:rPr sz="1500" b="1">
-                <a:solidFill>
-                  <a:srgbClr val="1A1A1A"/>
-                </a:solidFill>
-                <a:latin typeface="Calibri"/>
-              </a:rPr>
-              <a:t>Already halfway there</a:t>
-            </a:r>
-          </a:p>
-        </p:txBody>
-      </p:sp>
-      <p:sp>
-        <p:nvSpPr>
-          <p:cNvPr id="11" name="TextBox 10"/>
-          <p:cNvSpPr txBox="1"/>
-          <p:nvPr/>
-        </p:nvSpPr>
-        <p:spPr>
-          <a:xfrm>
-            <a:off x="585216" y="2011680"/>
-            <a:ext cx="3063240" cy="1463040"/>
-          </a:xfrm>
-          <a:prstGeom prst="rect">
-            <a:avLst/>
-          </a:prstGeom>
-          <a:noFill/>
-        </p:spPr>
-        <p:txBody>
-          <a:bodyPr wrap="square">
-            <a:spAutoFit/>
-          </a:bodyPr>
-          <a:lstStyle/>
-          <a:p>
             <a:pPr>
               <a:lnSpc>
-                <a:spcPct val="115000"/>
+                <a:spcPct val="125000"/>
               </a:lnSpc>
               <a:spcAft>
                 <a:spcPts val="1000"/>
               </a:spcAft>
             </a:pPr>
             <a:r>
-              <a:rPr sz="1250" b="1">
+              <a:rPr sz="1500" b="1">
                 <a:solidFill>
                   <a:srgbClr val="CC0E1E"/>
                 </a:solidFill>
@@ -8444,183 +8662,26 @@
               <a:t>—  </a:t>
             </a:r>
             <a:r>
-              <a:rPr sz="1250">
+              <a:rPr sz="1500">
                 <a:solidFill>
                   <a:srgbClr val="1A1A1A"/>
                 </a:solidFill>
                 <a:latin typeface="Calibri"/>
               </a:rPr>
-              <a:t>You already report Sales-to-Dealer monthly. The ask is the same data at part-number level.</a:t>
-            </a:r>
-          </a:p>
-        </p:txBody>
-      </p:sp>
-      <p:sp>
-        <p:nvSpPr>
-          <p:cNvPr id="12" name="Rounded Rectangle 11"/>
-          <p:cNvSpPr/>
-          <p:nvPr/>
-        </p:nvSpPr>
-        <p:spPr>
-          <a:xfrm>
-            <a:off x="4087368" y="1234440"/>
-            <a:ext cx="3611880" cy="2377440"/>
-          </a:xfrm>
-          <a:prstGeom prst="roundRect">
-            <a:avLst>
-              <a:gd name="adj" fmla="val 6000"/>
-            </a:avLst>
-          </a:prstGeom>
-          <a:solidFill>
-            <a:srgbClr val="ECECEC"/>
-          </a:solidFill>
-          <a:ln>
-            <a:noFill/>
-          </a:ln>
-          <a:effectLst/>
-        </p:spPr>
-        <p:style>
-          <a:lnRef idx="1">
-            <a:schemeClr val="accent1"/>
-          </a:lnRef>
-          <a:fillRef idx="3">
-            <a:schemeClr val="accent1"/>
-          </a:fillRef>
-          <a:effectRef idx="2">
-            <a:schemeClr val="accent1"/>
-          </a:effectRef>
-          <a:fontRef idx="minor">
-            <a:schemeClr val="lt1"/>
-          </a:fontRef>
-        </p:style>
-        <p:txBody>
-          <a:bodyPr rtlCol="0" anchor="ctr"/>
-          <a:lstStyle/>
-          <a:p>
-            <a:pPr algn="ctr"/>
-          </a:p>
-        </p:txBody>
-      </p:sp>
-      <p:sp>
-        <p:nvSpPr>
-          <p:cNvPr id="13" name="Oval 12"/>
-          <p:cNvSpPr/>
-          <p:nvPr/>
-        </p:nvSpPr>
-        <p:spPr>
-          <a:xfrm>
-            <a:off x="4288536" y="1435608"/>
-            <a:ext cx="457200" cy="457200"/>
-          </a:xfrm>
-          <a:prstGeom prst="ellipse">
-            <a:avLst/>
-          </a:prstGeom>
-          <a:solidFill>
-            <a:srgbClr val="CC0E1E"/>
-          </a:solidFill>
-          <a:ln>
-            <a:noFill/>
-          </a:ln>
-          <a:effectLst/>
-        </p:spPr>
-        <p:style>
-          <a:lnRef idx="1">
-            <a:schemeClr val="accent1"/>
-          </a:lnRef>
-          <a:fillRef idx="3">
-            <a:schemeClr val="accent1"/>
-          </a:fillRef>
-          <a:effectRef idx="2">
-            <a:schemeClr val="accent1"/>
-          </a:effectRef>
-          <a:fontRef idx="minor">
-            <a:schemeClr val="lt1"/>
-          </a:fontRef>
-        </p:style>
-        <p:txBody>
-          <a:bodyPr rtlCol="0" anchor="ctr" lIns="0" rIns="0" tIns="0" bIns="0"/>
-          <a:lstStyle/>
-          <a:p>
-            <a:pPr algn="ctr"/>
-            <a:r>
-              <a:rPr sz="1800" b="1">
-                <a:solidFill>
-                  <a:srgbClr val="FFFFFF"/>
-                </a:solidFill>
-                <a:latin typeface="Calibri"/>
-              </a:rPr>
-              <a:t>2</a:t>
-            </a:r>
-          </a:p>
-        </p:txBody>
-      </p:sp>
-      <p:sp>
-        <p:nvSpPr>
-          <p:cNvPr id="14" name="TextBox 13"/>
-          <p:cNvSpPr txBox="1"/>
-          <p:nvPr/>
-        </p:nvSpPr>
-        <p:spPr>
-          <a:xfrm>
-            <a:off x="4910328" y="1435608"/>
-            <a:ext cx="2606040" cy="411480"/>
-          </a:xfrm>
-          <a:prstGeom prst="rect">
-            <a:avLst/>
-          </a:prstGeom>
-          <a:noFill/>
-        </p:spPr>
-        <p:txBody>
-          <a:bodyPr wrap="square">
-            <a:spAutoFit/>
-          </a:bodyPr>
-          <a:lstStyle/>
-          <a:p>
-            <a:pPr algn="l"/>
-            <a:r>
-              <a:rPr sz="1500" b="1">
-                <a:solidFill>
-                  <a:srgbClr val="1A1A1A"/>
-                </a:solidFill>
-                <a:latin typeface="Calibri"/>
-              </a:rPr>
-              <a:t>Sharper insight</a:t>
-            </a:r>
-          </a:p>
-        </p:txBody>
-      </p:sp>
-      <p:sp>
-        <p:nvSpPr>
-          <p:cNvPr id="15" name="TextBox 14"/>
-          <p:cNvSpPr txBox="1"/>
-          <p:nvPr/>
-        </p:nvSpPr>
-        <p:spPr>
-          <a:xfrm>
-            <a:off x="4379976" y="2011680"/>
-            <a:ext cx="3063240" cy="1463040"/>
-          </a:xfrm>
-          <a:prstGeom prst="rect">
-            <a:avLst/>
-          </a:prstGeom>
-          <a:noFill/>
-        </p:spPr>
-        <p:txBody>
-          <a:bodyPr wrap="square">
-            <a:spAutoFit/>
-          </a:bodyPr>
-          <a:lstStyle/>
+              <a:t>Confirm FY2027 Sales-to-Dealer target: EUR 2,174,046 (+26.5% vs FY2026 Sales-to-Dealer).</a:t>
+            </a:r>
+          </a:p>
           <a:p>
             <a:pPr>
               <a:lnSpc>
-                <a:spcPct val="115000"/>
+                <a:spcPct val="125000"/>
               </a:lnSpc>
               <a:spcAft>
                 <a:spcPts val="1000"/>
               </a:spcAft>
             </a:pPr>
             <a:r>
-              <a:rPr sz="1250" b="1">
+              <a:rPr sz="1500" b="1">
                 <a:solidFill>
                   <a:srgbClr val="CC0E1E"/>
                 </a:solidFill>
@@ -8629,183 +8690,26 @@
               <a:t>—  </a:t>
             </a:r>
             <a:r>
-              <a:rPr sz="1250">
+              <a:rPr sz="1500">
                 <a:solidFill>
                   <a:srgbClr val="1A1A1A"/>
                 </a:solidFill>
                 <a:latin typeface="Calibri"/>
               </a:rPr>
-              <a:t>Part-by-part visibility separates a stock movement from a lost job — and tells us where the volume actually went.</a:t>
-            </a:r>
-          </a:p>
-        </p:txBody>
-      </p:sp>
-      <p:sp>
-        <p:nvSpPr>
-          <p:cNvPr id="16" name="Rounded Rectangle 15"/>
-          <p:cNvSpPr/>
-          <p:nvPr/>
-        </p:nvSpPr>
-        <p:spPr>
-          <a:xfrm>
-            <a:off x="7882127" y="1234440"/>
-            <a:ext cx="3611880" cy="2377440"/>
-          </a:xfrm>
-          <a:prstGeom prst="roundRect">
-            <a:avLst>
-              <a:gd name="adj" fmla="val 6000"/>
-            </a:avLst>
-          </a:prstGeom>
-          <a:solidFill>
-            <a:srgbClr val="ECECEC"/>
-          </a:solidFill>
-          <a:ln>
-            <a:noFill/>
-          </a:ln>
-          <a:effectLst/>
-        </p:spPr>
-        <p:style>
-          <a:lnRef idx="1">
-            <a:schemeClr val="accent1"/>
-          </a:lnRef>
-          <a:fillRef idx="3">
-            <a:schemeClr val="accent1"/>
-          </a:fillRef>
-          <a:effectRef idx="2">
-            <a:schemeClr val="accent1"/>
-          </a:effectRef>
-          <a:fontRef idx="minor">
-            <a:schemeClr val="lt1"/>
-          </a:fontRef>
-        </p:style>
-        <p:txBody>
-          <a:bodyPr rtlCol="0" anchor="ctr"/>
-          <a:lstStyle/>
-          <a:p>
-            <a:pPr algn="ctr"/>
-          </a:p>
-        </p:txBody>
-      </p:sp>
-      <p:sp>
-        <p:nvSpPr>
-          <p:cNvPr id="17" name="Oval 16"/>
-          <p:cNvSpPr/>
-          <p:nvPr/>
-        </p:nvSpPr>
-        <p:spPr>
-          <a:xfrm>
-            <a:off x="8083295" y="1435608"/>
-            <a:ext cx="457200" cy="457200"/>
-          </a:xfrm>
-          <a:prstGeom prst="ellipse">
-            <a:avLst/>
-          </a:prstGeom>
-          <a:solidFill>
-            <a:srgbClr val="CC0E1E"/>
-          </a:solidFill>
-          <a:ln>
-            <a:noFill/>
-          </a:ln>
-          <a:effectLst/>
-        </p:spPr>
-        <p:style>
-          <a:lnRef idx="1">
-            <a:schemeClr val="accent1"/>
-          </a:lnRef>
-          <a:fillRef idx="3">
-            <a:schemeClr val="accent1"/>
-          </a:fillRef>
-          <a:effectRef idx="2">
-            <a:schemeClr val="accent1"/>
-          </a:effectRef>
-          <a:fontRef idx="minor">
-            <a:schemeClr val="lt1"/>
-          </a:fontRef>
-        </p:style>
-        <p:txBody>
-          <a:bodyPr rtlCol="0" anchor="ctr" lIns="0" rIns="0" tIns="0" bIns="0"/>
-          <a:lstStyle/>
-          <a:p>
-            <a:pPr algn="ctr"/>
-            <a:r>
-              <a:rPr sz="1800" b="1">
-                <a:solidFill>
-                  <a:srgbClr val="FFFFFF"/>
-                </a:solidFill>
-                <a:latin typeface="Calibri"/>
-              </a:rPr>
-              <a:t>3</a:t>
-            </a:r>
-          </a:p>
-        </p:txBody>
-      </p:sp>
-      <p:sp>
-        <p:nvSpPr>
-          <p:cNvPr id="18" name="TextBox 17"/>
-          <p:cNvSpPr txBox="1"/>
-          <p:nvPr/>
-        </p:nvSpPr>
-        <p:spPr>
-          <a:xfrm>
-            <a:off x="8705087" y="1435608"/>
-            <a:ext cx="2606040" cy="411480"/>
-          </a:xfrm>
-          <a:prstGeom prst="rect">
-            <a:avLst/>
-          </a:prstGeom>
-          <a:noFill/>
-        </p:spPr>
-        <p:txBody>
-          <a:bodyPr wrap="square">
-            <a:spAutoFit/>
-          </a:bodyPr>
-          <a:lstStyle/>
-          <a:p>
-            <a:pPr algn="l"/>
-            <a:r>
-              <a:rPr sz="1500" b="1">
-                <a:solidFill>
-                  <a:srgbClr val="1A1A1A"/>
-                </a:solidFill>
-                <a:latin typeface="Calibri"/>
-              </a:rPr>
-              <a:t>Shared benefit</a:t>
-            </a:r>
-          </a:p>
-        </p:txBody>
-      </p:sp>
-      <p:sp>
-        <p:nvSpPr>
-          <p:cNvPr id="19" name="TextBox 18"/>
-          <p:cNvSpPr txBox="1"/>
-          <p:nvPr/>
-        </p:nvSpPr>
-        <p:spPr>
-          <a:xfrm>
-            <a:off x="8174735" y="2011680"/>
-            <a:ext cx="3063240" cy="1463040"/>
-          </a:xfrm>
-          <a:prstGeom prst="rect">
-            <a:avLst/>
-          </a:prstGeom>
-          <a:noFill/>
-        </p:spPr>
-        <p:txBody>
-          <a:bodyPr wrap="square">
-            <a:spAutoFit/>
-          </a:bodyPr>
-          <a:lstStyle/>
+              <a:t>Confirm the incentive alongside the price adjustment once approved on our side.</a:t>
+            </a:r>
+          </a:p>
           <a:p>
             <a:pPr>
               <a:lnSpc>
-                <a:spcPct val="115000"/>
+                <a:spcPct val="125000"/>
               </a:lnSpc>
               <a:spcAft>
                 <a:spcPts val="1000"/>
               </a:spcAft>
             </a:pPr>
             <a:r>
-              <a:rPr sz="1250" b="1">
+              <a:rPr sz="1500" b="1">
                 <a:solidFill>
                   <a:srgbClr val="CC0E1E"/>
                 </a:solidFill>
@@ -8814,48 +8718,69 @@
               <a:t>—  </a:t>
             </a:r>
             <a:r>
-              <a:rPr sz="1250">
+              <a:rPr sz="1500">
                 <a:solidFill>
                   <a:srgbClr val="1A1A1A"/>
                 </a:solidFill>
                 <a:latin typeface="Calibri"/>
               </a:rPr>
-              <a:t>Better availability on your fast movers, a sharper target for us, and a factual basis for the SPA — same data, both sides gain.</a:t>
-            </a:r>
-          </a:p>
-        </p:txBody>
-      </p:sp>
-      <p:sp>
-        <p:nvSpPr>
-          <p:cNvPr id="20" name="TextBox 19"/>
-          <p:cNvSpPr txBox="1"/>
-          <p:nvPr/>
-        </p:nvSpPr>
-        <p:spPr>
-          <a:xfrm>
-            <a:off x="292608" y="3886200"/>
-            <a:ext cx="8595360" cy="365760"/>
-          </a:xfrm>
-          <a:prstGeom prst="rect">
-            <a:avLst/>
-          </a:prstGeom>
-          <a:noFill/>
-        </p:spPr>
-        <p:txBody>
-          <a:bodyPr wrap="square">
-            <a:spAutoFit/>
-          </a:bodyPr>
-          <a:lstStyle/>
-          <a:p>
-            <a:pPr algn="l"/>
-            <a:r>
-              <a:rPr sz="1400" b="1">
+              <a:t>Filters / Electrical sensors / Injectors: agree which category we tackle first, and what the joint action is.</a:t>
+            </a:r>
+          </a:p>
+          <a:p>
+            <a:pPr>
+              <a:lnSpc>
+                <a:spcPct val="125000"/>
+              </a:lnSpc>
+              <a:spcAft>
+                <a:spcPts val="1000"/>
+              </a:spcAft>
+            </a:pPr>
+            <a:r>
+              <a:rPr sz="1500" b="1">
                 <a:solidFill>
                   <a:srgbClr val="CC0E1E"/>
                 </a:solidFill>
                 <a:latin typeface="Calibri"/>
               </a:rPr>
-              <a:t>Requested from 01/01/2025, part number level, monthly.</a:t>
+              <a:t>—  </a:t>
+            </a:r>
+            <a:r>
+              <a:rPr sz="1500">
+                <a:solidFill>
+                  <a:srgbClr val="1A1A1A"/>
+                </a:solidFill>
+                <a:latin typeface="Calibri"/>
+              </a:rPr>
+              <a:t>Agree part-level Sales-to-Dealer data sharing, effective 01/01/2025.</a:t>
+            </a:r>
+          </a:p>
+          <a:p>
+            <a:pPr>
+              <a:lnSpc>
+                <a:spcPct val="125000"/>
+              </a:lnSpc>
+              <a:spcAft>
+                <a:spcPts val="1000"/>
+              </a:spcAft>
+            </a:pPr>
+            <a:r>
+              <a:rPr sz="1500" b="1">
+                <a:solidFill>
+                  <a:srgbClr val="CC0E1E"/>
+                </a:solidFill>
+                <a:latin typeface="Calibri"/>
+              </a:rPr>
+              <a:t>—  </a:t>
+            </a:r>
+            <a:r>
+              <a:rPr sz="1500">
+                <a:solidFill>
+                  <a:srgbClr val="1A1A1A"/>
+                </a:solidFill>
+                <a:latin typeface="Calibri"/>
+              </a:rPr>
+              <a:t>SPA: IRELAND proposal, ISZE review and counter-proposal cycle to follow.</a:t>
             </a:r>
           </a:p>
         </p:txBody>
@@ -8869,410 +8794,6 @@
 </file>
 
 <file path=ppt/slides/slide18.xml><?xml version="1.0" encoding="utf-8"?>
-<p:sld xmlns:a="http://schemas.openxmlformats.org/drawingml/2006/main" xmlns:p="http://schemas.openxmlformats.org/presentationml/2006/main" xmlns:r="http://schemas.openxmlformats.org/officeDocument/2006/relationships">
-  <p:cSld>
-    <p:bg>
-      <p:bgPr>
-        <a:solidFill>
-          <a:srgbClr val="FFFFFF"/>
-        </a:solidFill>
-        <a:effectLst/>
-      </p:bgPr>
-    </p:bg>
-    <p:spTree>
-      <p:nvGrpSpPr>
-        <p:cNvPr id="1" name=""/>
-        <p:cNvGrpSpPr/>
-        <p:nvPr/>
-      </p:nvGrpSpPr>
-      <p:grpSpPr/>
-      <p:pic>
-        <p:nvPicPr>
-          <p:cNvPr id="2" name="Picture 1" descr="isuzu_logo_red.png"/>
-          <p:cNvPicPr>
-            <a:picLocks noChangeAspect="1"/>
-          </p:cNvPicPr>
-          <p:nvPr/>
-        </p:nvPicPr>
-        <p:blipFill>
-          <a:blip r:embed="rId2"/>
-          <a:stretch>
-            <a:fillRect/>
-          </a:stretch>
-        </p:blipFill>
-        <p:spPr>
-          <a:xfrm>
-            <a:off x="256032" y="6263640"/>
-            <a:ext cx="1679787" cy="292608"/>
-          </a:xfrm>
-          <a:prstGeom prst="rect">
-            <a:avLst/>
-          </a:prstGeom>
-        </p:spPr>
-      </p:pic>
-      <p:sp>
-        <p:nvSpPr>
-          <p:cNvPr id="3" name="Rectangle 2"/>
-          <p:cNvSpPr/>
-          <p:nvPr/>
-        </p:nvSpPr>
-        <p:spPr>
-          <a:xfrm>
-            <a:off x="0" y="6766560"/>
-            <a:ext cx="12188952" cy="91440"/>
-          </a:xfrm>
-          <a:prstGeom prst="rect">
-            <a:avLst/>
-          </a:prstGeom>
-          <a:solidFill>
-            <a:srgbClr val="CC0E1E"/>
-          </a:solidFill>
-          <a:ln>
-            <a:noFill/>
-          </a:ln>
-        </p:spPr>
-        <p:style>
-          <a:lnRef idx="1">
-            <a:schemeClr val="accent1"/>
-          </a:lnRef>
-          <a:fillRef idx="3">
-            <a:schemeClr val="accent1"/>
-          </a:fillRef>
-          <a:effectRef idx="2">
-            <a:schemeClr val="accent1"/>
-          </a:effectRef>
-          <a:fontRef idx="minor">
-            <a:schemeClr val="lt1"/>
-          </a:fontRef>
-        </p:style>
-        <p:txBody>
-          <a:bodyPr rtlCol="0" anchor="ctr"/>
-          <a:lstStyle/>
-          <a:p>
-            <a:pPr algn="ctr"/>
-          </a:p>
-        </p:txBody>
-      </p:sp>
-      <p:sp>
-        <p:nvSpPr>
-          <p:cNvPr id="4" name="TextBox 3"/>
-          <p:cNvSpPr txBox="1"/>
-          <p:nvPr/>
-        </p:nvSpPr>
-        <p:spPr>
-          <a:xfrm>
-            <a:off x="292608" y="201168"/>
-            <a:ext cx="11430000" cy="274320"/>
-          </a:xfrm>
-          <a:prstGeom prst="rect">
-            <a:avLst/>
-          </a:prstGeom>
-          <a:noFill/>
-        </p:spPr>
-        <p:txBody>
-          <a:bodyPr wrap="square">
-            <a:spAutoFit/>
-          </a:bodyPr>
-          <a:lstStyle/>
-          <a:p>
-            <a:pPr algn="l"/>
-            <a:r>
-              <a:rPr sz="1100" b="1">
-                <a:solidFill>
-                  <a:srgbClr val="CC0E1E"/>
-                </a:solidFill>
-                <a:latin typeface="Calibri"/>
-              </a:rPr>
-              <a:t>SUMMARY</a:t>
-            </a:r>
-          </a:p>
-        </p:txBody>
-      </p:sp>
-      <p:sp>
-        <p:nvSpPr>
-          <p:cNvPr id="5" name="TextBox 4"/>
-          <p:cNvSpPr txBox="1"/>
-          <p:nvPr/>
-        </p:nvSpPr>
-        <p:spPr>
-          <a:xfrm>
-            <a:off x="292608" y="475488"/>
-            <a:ext cx="11612880" cy="566928"/>
-          </a:xfrm>
-          <a:prstGeom prst="rect">
-            <a:avLst/>
-          </a:prstGeom>
-          <a:noFill/>
-        </p:spPr>
-        <p:txBody>
-          <a:bodyPr wrap="square">
-            <a:spAutoFit/>
-          </a:bodyPr>
-          <a:lstStyle/>
-          <a:p>
-            <a:pPr algn="l"/>
-            <a:r>
-              <a:rPr sz="2500" b="1">
-                <a:solidFill>
-                  <a:srgbClr val="1A1A1A"/>
-                </a:solidFill>
-                <a:latin typeface="Calibri"/>
-              </a:rPr>
-              <a:t>Next steps</a:t>
-            </a:r>
-          </a:p>
-        </p:txBody>
-      </p:sp>
-      <p:sp>
-        <p:nvSpPr>
-          <p:cNvPr id="6" name="Rectangle 5"/>
-          <p:cNvSpPr/>
-          <p:nvPr/>
-        </p:nvSpPr>
-        <p:spPr>
-          <a:xfrm>
-            <a:off x="292608" y="1005840"/>
-            <a:ext cx="11612880" cy="28000"/>
-          </a:xfrm>
-          <a:prstGeom prst="rect">
-            <a:avLst/>
-          </a:prstGeom>
-          <a:solidFill>
-            <a:srgbClr val="CC0E1E"/>
-          </a:solidFill>
-          <a:ln>
-            <a:noFill/>
-          </a:ln>
-        </p:spPr>
-        <p:style>
-          <a:lnRef idx="1">
-            <a:schemeClr val="accent1"/>
-          </a:lnRef>
-          <a:fillRef idx="3">
-            <a:schemeClr val="accent1"/>
-          </a:fillRef>
-          <a:effectRef idx="2">
-            <a:schemeClr val="accent1"/>
-          </a:effectRef>
-          <a:fontRef idx="minor">
-            <a:schemeClr val="lt1"/>
-          </a:fontRef>
-        </p:style>
-        <p:txBody>
-          <a:bodyPr rtlCol="0" anchor="ctr"/>
-          <a:lstStyle/>
-          <a:p>
-            <a:pPr algn="ctr"/>
-          </a:p>
-        </p:txBody>
-      </p:sp>
-      <p:sp>
-        <p:nvSpPr>
-          <p:cNvPr id="7" name="TextBox 6"/>
-          <p:cNvSpPr txBox="1"/>
-          <p:nvPr/>
-        </p:nvSpPr>
-        <p:spPr>
-          <a:xfrm>
-            <a:off x="11594592" y="6473952"/>
-            <a:ext cx="365760" cy="274320"/>
-          </a:xfrm>
-          <a:prstGeom prst="rect">
-            <a:avLst/>
-          </a:prstGeom>
-          <a:noFill/>
-        </p:spPr>
-        <p:txBody>
-          <a:bodyPr wrap="square">
-            <a:spAutoFit/>
-          </a:bodyPr>
-          <a:lstStyle/>
-          <a:p>
-            <a:pPr algn="r"/>
-            <a:r>
-              <a:rPr sz="1000" b="0">
-                <a:solidFill>
-                  <a:srgbClr val="5A5A5A"/>
-                </a:solidFill>
-                <a:latin typeface="Calibri"/>
-              </a:rPr>
-              <a:t>18</a:t>
-            </a:r>
-          </a:p>
-        </p:txBody>
-      </p:sp>
-      <p:sp>
-        <p:nvSpPr>
-          <p:cNvPr id="8" name="TextBox 7"/>
-          <p:cNvSpPr txBox="1"/>
-          <p:nvPr/>
-        </p:nvSpPr>
-        <p:spPr>
-          <a:xfrm>
-            <a:off x="292608" y="1234440"/>
-            <a:ext cx="11612880" cy="4206240"/>
-          </a:xfrm>
-          <a:prstGeom prst="rect">
-            <a:avLst/>
-          </a:prstGeom>
-          <a:noFill/>
-        </p:spPr>
-        <p:txBody>
-          <a:bodyPr wrap="square">
-            <a:spAutoFit/>
-          </a:bodyPr>
-          <a:lstStyle/>
-          <a:p>
-            <a:pPr>
-              <a:lnSpc>
-                <a:spcPct val="125000"/>
-              </a:lnSpc>
-              <a:spcAft>
-                <a:spcPts val="1000"/>
-              </a:spcAft>
-            </a:pPr>
-            <a:r>
-              <a:rPr sz="1500" b="1">
-                <a:solidFill>
-                  <a:srgbClr val="CC0E1E"/>
-                </a:solidFill>
-                <a:latin typeface="Calibri"/>
-              </a:rPr>
-              <a:t>—  </a:t>
-            </a:r>
-            <a:r>
-              <a:rPr sz="1500">
-                <a:solidFill>
-                  <a:srgbClr val="1A1A1A"/>
-                </a:solidFill>
-                <a:latin typeface="Calibri"/>
-              </a:rPr>
-              <a:t>Confirm FY2027 Sales-to-Dealer target: EUR 3,585,313 (+26.5% vs FY2026 Sales-to-Dealer).</a:t>
-            </a:r>
-          </a:p>
-          <a:p>
-            <a:pPr>
-              <a:lnSpc>
-                <a:spcPct val="125000"/>
-              </a:lnSpc>
-              <a:spcAft>
-                <a:spcPts val="1000"/>
-              </a:spcAft>
-            </a:pPr>
-            <a:r>
-              <a:rPr sz="1500" b="1">
-                <a:solidFill>
-                  <a:srgbClr val="CC0E1E"/>
-                </a:solidFill>
-                <a:latin typeface="Calibri"/>
-              </a:rPr>
-              <a:t>—  </a:t>
-            </a:r>
-            <a:r>
-              <a:rPr sz="1500">
-                <a:solidFill>
-                  <a:srgbClr val="1A1A1A"/>
-                </a:solidFill>
-                <a:latin typeface="Calibri"/>
-              </a:rPr>
-              <a:t>Confirm the incentive alongside the price adjustment once approved on our side.</a:t>
-            </a:r>
-          </a:p>
-          <a:p>
-            <a:pPr>
-              <a:lnSpc>
-                <a:spcPct val="125000"/>
-              </a:lnSpc>
-              <a:spcAft>
-                <a:spcPts val="1000"/>
-              </a:spcAft>
-            </a:pPr>
-            <a:r>
-              <a:rPr sz="1500" b="1">
-                <a:solidFill>
-                  <a:srgbClr val="CC0E1E"/>
-                </a:solidFill>
-                <a:latin typeface="Calibri"/>
-              </a:rPr>
-              <a:t>—  </a:t>
-            </a:r>
-            <a:r>
-              <a:rPr sz="1500">
-                <a:solidFill>
-                  <a:srgbClr val="1A1A1A"/>
-                </a:solidFill>
-                <a:latin typeface="Calibri"/>
-              </a:rPr>
-              <a:t>Electrical sensors / Filters / Injectors: agree which category we tackle first, and what the joint action is.</a:t>
-            </a:r>
-          </a:p>
-          <a:p>
-            <a:pPr>
-              <a:lnSpc>
-                <a:spcPct val="125000"/>
-              </a:lnSpc>
-              <a:spcAft>
-                <a:spcPts val="1000"/>
-              </a:spcAft>
-            </a:pPr>
-            <a:r>
-              <a:rPr sz="1500" b="1">
-                <a:solidFill>
-                  <a:srgbClr val="CC0E1E"/>
-                </a:solidFill>
-                <a:latin typeface="Calibri"/>
-              </a:rPr>
-              <a:t>—  </a:t>
-            </a:r>
-            <a:r>
-              <a:rPr sz="1500">
-                <a:solidFill>
-                  <a:srgbClr val="1A1A1A"/>
-                </a:solidFill>
-                <a:latin typeface="Calibri"/>
-              </a:rPr>
-              <a:t>Agree part-level Sales-to-Dealer data sharing, effective 01/01/2025.</a:t>
-            </a:r>
-          </a:p>
-          <a:p>
-            <a:pPr>
-              <a:lnSpc>
-                <a:spcPct val="125000"/>
-              </a:lnSpc>
-              <a:spcAft>
-                <a:spcPts val="1000"/>
-              </a:spcAft>
-            </a:pPr>
-            <a:r>
-              <a:rPr sz="1500" b="1">
-                <a:solidFill>
-                  <a:srgbClr val="CC0E1E"/>
-                </a:solidFill>
-                <a:latin typeface="Calibri"/>
-              </a:rPr>
-              <a:t>—  </a:t>
-            </a:r>
-            <a:r>
-              <a:rPr sz="1500">
-                <a:solidFill>
-                  <a:srgbClr val="1A1A1A"/>
-                </a:solidFill>
-                <a:latin typeface="Calibri"/>
-              </a:rPr>
-              <a:t>SPA: IRELAND proposal, ISZE review and counter-proposal cycle to follow.</a:t>
-            </a:r>
-          </a:p>
-        </p:txBody>
-      </p:sp>
-    </p:spTree>
-  </p:cSld>
-  <p:clrMapOvr>
-    <a:masterClrMapping/>
-  </p:clrMapOvr>
-</p:sld>
-</file>
-
-<file path=ppt/slides/slide19.xml><?xml version="1.0" encoding="utf-8"?>
 <p:sld xmlns:a="http://schemas.openxmlformats.org/drawingml/2006/main" xmlns:p="http://schemas.openxmlformats.org/presentationml/2006/main" xmlns:r="http://schemas.openxmlformats.org/officeDocument/2006/relationships">
   <p:cSld>
     <p:bg>
@@ -9664,7 +9185,7 @@
               </a:spcAft>
             </a:pPr>
             <a:r>
-              <a:rPr sz="1300" b="1">
+              <a:rPr sz="1450" b="1">
                 <a:solidFill>
                   <a:srgbClr val="CC0E1E"/>
                 </a:solidFill>
@@ -9673,7 +9194,7 @@
               <a:t>—  </a:t>
             </a:r>
             <a:r>
-              <a:rPr sz="1300">
+              <a:rPr sz="1450">
                 <a:solidFill>
                   <a:srgbClr val="1A1A1A"/>
                 </a:solidFill>
@@ -9692,7 +9213,7 @@
               </a:spcAft>
             </a:pPr>
             <a:r>
-              <a:rPr sz="1300" b="1">
+              <a:rPr sz="1450" b="1">
                 <a:solidFill>
                   <a:srgbClr val="CC0E1E"/>
                 </a:solidFill>
@@ -9701,13 +9222,13 @@
               <a:t>—  </a:t>
             </a:r>
             <a:r>
-              <a:rPr sz="1300">
+              <a:rPr sz="1450">
                 <a:solidFill>
                   <a:srgbClr val="1A1A1A"/>
                 </a:solidFill>
                 <a:latin typeface="Calibri"/>
               </a:rPr>
-              <a:t>Parts Performance — Electrical sensors</a:t>
+              <a:t>Parts Performance — Filters</a:t>
             </a:r>
           </a:p>
           <a:p>
@@ -9720,7 +9241,7 @@
               </a:spcAft>
             </a:pPr>
             <a:r>
-              <a:rPr sz="1300" b="1">
+              <a:rPr sz="1450" b="1">
                 <a:solidFill>
                   <a:srgbClr val="CC0E1E"/>
                 </a:solidFill>
@@ -9729,13 +9250,13 @@
               <a:t>—  </a:t>
             </a:r>
             <a:r>
-              <a:rPr sz="1300">
+              <a:rPr sz="1450">
                 <a:solidFill>
                   <a:srgbClr val="1A1A1A"/>
                 </a:solidFill>
                 <a:latin typeface="Calibri"/>
               </a:rPr>
-              <a:t>Parts Performance — Filters</a:t>
+              <a:t>Parts Performance — Electrical sensors</a:t>
             </a:r>
           </a:p>
           <a:p>
@@ -9748,7 +9269,7 @@
               </a:spcAft>
             </a:pPr>
             <a:r>
-              <a:rPr sz="1300" b="1">
+              <a:rPr sz="1450" b="1">
                 <a:solidFill>
                   <a:srgbClr val="CC0E1E"/>
                 </a:solidFill>
@@ -9757,7 +9278,7 @@
               <a:t>—  </a:t>
             </a:r>
             <a:r>
-              <a:rPr sz="1300">
+              <a:rPr sz="1450">
                 <a:solidFill>
                   <a:srgbClr val="1A1A1A"/>
                 </a:solidFill>
@@ -9776,7 +9297,7 @@
               </a:spcAft>
             </a:pPr>
             <a:r>
-              <a:rPr sz="1300" b="1">
+              <a:rPr sz="1450" b="1">
                 <a:solidFill>
                   <a:srgbClr val="CC0E1E"/>
                 </a:solidFill>
@@ -9785,7 +9306,7 @@
               <a:t>—  </a:t>
             </a:r>
             <a:r>
-              <a:rPr sz="1300">
+              <a:rPr sz="1450">
                 <a:solidFill>
                   <a:srgbClr val="1A1A1A"/>
                 </a:solidFill>
@@ -9804,7 +9325,7 @@
               </a:spcAft>
             </a:pPr>
             <a:r>
-              <a:rPr sz="1300" b="1">
+              <a:rPr sz="1450" b="1">
                 <a:solidFill>
                   <a:srgbClr val="CC0E1E"/>
                 </a:solidFill>
@@ -9813,7 +9334,7 @@
               <a:t>—  </a:t>
             </a:r>
             <a:r>
-              <a:rPr sz="1300">
+              <a:rPr sz="1450">
                 <a:solidFill>
                   <a:srgbClr val="1A1A1A"/>
                 </a:solidFill>
@@ -9832,7 +9353,7 @@
               </a:spcAft>
             </a:pPr>
             <a:r>
-              <a:rPr sz="1300" b="1">
+              <a:rPr sz="1450" b="1">
                 <a:solidFill>
                   <a:srgbClr val="CC0E1E"/>
                 </a:solidFill>
@@ -9841,7 +9362,7 @@
               <a:t>—  </a:t>
             </a:r>
             <a:r>
-              <a:rPr sz="1300">
+              <a:rPr sz="1450">
                 <a:solidFill>
                   <a:srgbClr val="1A1A1A"/>
                 </a:solidFill>
@@ -9860,7 +9381,7 @@
               </a:spcAft>
             </a:pPr>
             <a:r>
-              <a:rPr sz="1300" b="1">
+              <a:rPr sz="1450" b="1">
                 <a:solidFill>
                   <a:srgbClr val="CC0E1E"/>
                 </a:solidFill>
@@ -9869,7 +9390,7 @@
               <a:t>—  </a:t>
             </a:r>
             <a:r>
-              <a:rPr sz="1300">
+              <a:rPr sz="1450">
                 <a:solidFill>
                   <a:srgbClr val="1A1A1A"/>
                 </a:solidFill>
@@ -9888,7 +9409,7 @@
               </a:spcAft>
             </a:pPr>
             <a:r>
-              <a:rPr sz="1300" b="1">
+              <a:rPr sz="1450" b="1">
                 <a:solidFill>
                   <a:srgbClr val="CC0E1E"/>
                 </a:solidFill>
@@ -9897,13 +9418,13 @@
               <a:t>—  </a:t>
             </a:r>
             <a:r>
-              <a:rPr sz="1300">
+              <a:rPr sz="1450">
                 <a:solidFill>
                   <a:srgbClr val="1A1A1A"/>
                 </a:solidFill>
                 <a:latin typeface="Calibri"/>
               </a:rPr>
-              <a:t>Service-Parts Coverage</a:t>
+              <a:t>Fleet &amp; FY2027 Target</a:t>
             </a:r>
           </a:p>
           <a:p>
@@ -9916,7 +9437,7 @@
               </a:spcAft>
             </a:pPr>
             <a:r>
-              <a:rPr sz="1300" b="1">
+              <a:rPr sz="1450" b="1">
                 <a:solidFill>
                   <a:srgbClr val="CC0E1E"/>
                 </a:solidFill>
@@ -9925,13 +9446,13 @@
               <a:t>—  </a:t>
             </a:r>
             <a:r>
-              <a:rPr sz="1300">
+              <a:rPr sz="1450">
                 <a:solidFill>
                   <a:srgbClr val="1A1A1A"/>
                 </a:solidFill>
                 <a:latin typeface="Calibri"/>
               </a:rPr>
-              <a:t>Fleet &amp; FY2027 Target</a:t>
+              <a:t>SPA — status</a:t>
             </a:r>
           </a:p>
           <a:p>
@@ -9944,7 +9465,7 @@
               </a:spcAft>
             </a:pPr>
             <a:r>
-              <a:rPr sz="1300" b="1">
+              <a:rPr sz="1450" b="1">
                 <a:solidFill>
                   <a:srgbClr val="CC0E1E"/>
                 </a:solidFill>
@@ -9953,13 +9474,13 @@
               <a:t>—  </a:t>
             </a:r>
             <a:r>
-              <a:rPr sz="1300">
+              <a:rPr sz="1450">
                 <a:solidFill>
                   <a:srgbClr val="1A1A1A"/>
                 </a:solidFill>
                 <a:latin typeface="Calibri"/>
               </a:rPr>
-              <a:t>SPA — status</a:t>
+              <a:t>R&amp;M — market discussion</a:t>
             </a:r>
           </a:p>
           <a:p>
@@ -9972,7 +9493,7 @@
               </a:spcAft>
             </a:pPr>
             <a:r>
-              <a:rPr sz="1300" b="1">
+              <a:rPr sz="1450" b="1">
                 <a:solidFill>
                   <a:srgbClr val="CC0E1E"/>
                 </a:solidFill>
@@ -9981,13 +9502,13 @@
               <a:t>—  </a:t>
             </a:r>
             <a:r>
-              <a:rPr sz="1300">
+              <a:rPr sz="1450">
                 <a:solidFill>
                   <a:srgbClr val="1A1A1A"/>
                 </a:solidFill>
                 <a:latin typeface="Calibri"/>
               </a:rPr>
-              <a:t>R&amp;M — market discussion</a:t>
+              <a:t>Data request: part-level Sales-to-Dealer</a:t>
             </a:r>
           </a:p>
           <a:p>
@@ -10000,7 +9521,7 @@
               </a:spcAft>
             </a:pPr>
             <a:r>
-              <a:rPr sz="1300" b="1">
+              <a:rPr sz="1450" b="1">
                 <a:solidFill>
                   <a:srgbClr val="CC0E1E"/>
                 </a:solidFill>
@@ -10009,35 +9530,7 @@
               <a:t>—  </a:t>
             </a:r>
             <a:r>
-              <a:rPr sz="1300">
-                <a:solidFill>
-                  <a:srgbClr val="1A1A1A"/>
-                </a:solidFill>
-                <a:latin typeface="Calibri"/>
-              </a:rPr>
-              <a:t>Data request: part-level Sales-to-Dealer</a:t>
-            </a:r>
-          </a:p>
-          <a:p>
-            <a:pPr>
-              <a:lnSpc>
-                <a:spcPct val="110000"/>
-              </a:lnSpc>
-              <a:spcAft>
-                <a:spcPts val="1000"/>
-              </a:spcAft>
-            </a:pPr>
-            <a:r>
-              <a:rPr sz="1300" b="1">
-                <a:solidFill>
-                  <a:srgbClr val="CC0E1E"/>
-                </a:solidFill>
-                <a:latin typeface="Calibri"/>
-              </a:rPr>
-              <a:t>—  </a:t>
-            </a:r>
-            <a:r>
-              <a:rPr sz="1300">
+              <a:rPr sz="1450">
                 <a:solidFill>
                   <a:srgbClr val="1A1A1A"/>
                 </a:solidFill>
@@ -10305,8 +9798,8 @@
         </p:blipFill>
         <p:spPr>
           <a:xfrm>
-            <a:off x="292608" y="2120980"/>
-            <a:ext cx="7178040" cy="3027520"/>
+            <a:off x="292608" y="2121722"/>
+            <a:ext cx="7178040" cy="3026036"/>
           </a:xfrm>
           <a:prstGeom prst="rect">
             <a:avLst/>
@@ -10437,7 +9930,7 @@
                 </a:solidFill>
                 <a:latin typeface="Calibri"/>
               </a:rPr>
-              <a:t>Commercial parts billing (warranty/campaign excluded) EUR 464K against EUR 586K a year earlier — -20.8% (CY H1 2026 vs CY H1 2025, Jan–Jun).</a:t>
+              <a:t>Commercial parts billing (warranty/campaign excluded) EUR 481K against EUR 586K a year earlier — -17.9% (CY H1 2026 vs CY H1 2025, Jan–Jun).</a:t>
             </a:r>
           </a:p>
           <a:p>
@@ -10465,7 +9958,7 @@
                 </a:solidFill>
                 <a:latin typeface="Calibri"/>
               </a:rPr>
-              <a:t>Largest PN drops: 8983528481 (SENSOR; NOX) EUR -6K, 22 fewer pcs; 8976695331 (METER COMPL; CLUSTER) EUR -4K, 13 fewer pcs; 8982457540 (NOZZLE ASM; INJ) EUR -4K, 14 fewer pcs.</a:t>
+              <a:t>Largest PN drops (all categories): 8983528481 (SENSOR; NOX) EUR -6K, 22 fewer pcs; 8976695331 (METER COMPL; CLUSTER) EUR -4K, 13 fewer pcs; 8982457540 (NOZZLE ASM; INJ) EUR -4K, 14 fewer pcs.</a:t>
             </a:r>
           </a:p>
           <a:p>
@@ -10493,7 +9986,7 @@
                 </a:solidFill>
                 <a:latin typeface="Calibri"/>
               </a:rPr>
-              <a:t>Largest PN gains: 5874123812 (INTERFACE MX2-T) EUR 7K, 7 more pcs; 8982404570 (DRIVE ASM; FINAL,RR) EUR 3K, 2 more pcs; 8974985741 (TURBOCHARGER ASM) EUR 3K, 3 more pcs.</a:t>
+              <a:t>Largest PN gains (all categories): 5874123812 (INTERFACE MX2-T) EUR 7K, 7 more pcs; 8982404570 (DRIVE ASM; FINAL,RR) EUR 3K, 2 more pcs; 8974985741 (TURBOCHARGER ASM) EUR 3K, 3 more pcs.</a:t>
             </a:r>
           </a:p>
           <a:p>
@@ -10521,7 +10014,7 @@
                 </a:solidFill>
                 <a:latin typeface="Calibri"/>
               </a:rPr>
-              <a:t>About EUR 42K of claim-matched PN billing was stripped so this chart is aftermarket demand, not warranty.</a:t>
+              <a:t>About EUR 48K of claim-matched PN billing was stripped so this chart is aftermarket demand, not warranty.</a:t>
             </a:r>
           </a:p>
         </p:txBody>
@@ -10649,7 +10142,7 @@
                 </a:solidFill>
                 <a:latin typeface="Calibri"/>
               </a:rPr>
-              <a:t>PARTS PERFORMANCE — ELECTRICAL SENSORS</a:t>
+              <a:t>PARTS PERFORMANCE — FILTERS</a:t>
             </a:r>
           </a:p>
         </p:txBody>
@@ -10684,7 +10177,7 @@
                 </a:solidFill>
                 <a:latin typeface="Calibri"/>
               </a:rPr>
-              <a:t>Electrical sensors — CY H1 2026 vs CY H1 2025 (commercial, ex-warranty)</a:t>
+              <a:t>Filters — CY H1 2026 vs CY H1 2025 (commercial, ex-warranty)</a:t>
             </a:r>
           </a:p>
         </p:txBody>
@@ -10813,7 +10306,7 @@
                 </a:solidFill>
                 <a:latin typeface="Calibri"/>
               </a:rPr>
-              <a:t>EUR 68,893 (CY H1 2025) to EUR 50,976 (CY H1 2026), down EUR 17,917 (-26%).</a:t>
+              <a:t>EUR 45,771 (CY H1 2025) to EUR 28,827 (CY H1 2026), down EUR 16,945 (-37%).</a:t>
             </a:r>
           </a:p>
           <a:p>
@@ -10869,7 +10362,7 @@
                 </a:solidFill>
                 <a:latin typeface="Calibri"/>
               </a:rPr>
-              <a:t>8983528481 (SENSOR; NOX): EUR 16,129 to EUR 10,240, 22 fewer pieces.</a:t>
+              <a:t>8980329082 (FILTER ASM): EUR 3,366 to EUR 0, 4 fewer pieces.</a:t>
             </a:r>
           </a:p>
           <a:p>
@@ -10897,7 +10390,7 @@
                 </a:solidFill>
                 <a:latin typeface="Calibri"/>
               </a:rPr>
-              <a:t>8976695331 (METER COMPL; CLUSTER): EUR 4,616 to EUR 318, 13 fewer pieces.</a:t>
+              <a:t>8983282070 (ELEMENT; OIL FILTER · FRR,FS*,FTR,FVR,NPS,N*R): EUR 4,666 to EUR 1,568, 212 fewer pieces.</a:t>
             </a:r>
           </a:p>
           <a:p>
@@ -10925,7 +10418,7 @@
                 </a:solidFill>
                 <a:latin typeface="Calibri"/>
               </a:rPr>
-              <a:t>8982201260 (SENSOR; SPEED): EUR 1,452 to EUR 0, 7 fewer pieces.</a:t>
+              <a:t>8975425400 (ELEMENT; FUEL FILTER · FV*,FT*,FS*,FR*,N*R,N*S): EUR 3,649 to EUR 1,448, 173 fewer pieces.</a:t>
             </a:r>
           </a:p>
           <a:p>
@@ -10953,7 +10446,7 @@
                 </a:solidFill>
                 <a:latin typeface="Calibri"/>
               </a:rPr>
-              <a:t>8976695321 (METER COMPL; CLUSTER): EUR 1,319 to EUR 0, 4 fewer pieces.</a:t>
+              <a:t>5876102200 (ELEMENT KIT; FUEL FILTER · N*R,NPS): EUR 1,711 to EUR 250, 76 fewer pieces.</a:t>
             </a:r>
           </a:p>
         </p:txBody>
@@ -11039,7 +10532,7 @@
                 </a:solidFill>
                 <a:latin typeface="Calibri"/>
               </a:rPr>
-              <a:t>Is this pricing against what the dealers can buy locally?</a:t>
+              <a:t>Are dealers stocking filters, or ordering line-by-line against each job?</a:t>
             </a:r>
           </a:p>
           <a:p>
@@ -11067,7 +10560,7 @@
                 </a:solidFill>
                 <a:latin typeface="Calibri"/>
               </a:rPr>
-              <a:t>Is any of this stock timing on your side rather than end demand?</a:t>
+              <a:t>How much servicing do you estimate is happening outside the franchised network?</a:t>
             </a:r>
           </a:p>
           <a:p>
@@ -11095,7 +10588,7 @@
                 </a:solidFill>
                 <a:latin typeface="Calibri"/>
               </a:rPr>
-              <a:t>What would make the biggest difference to keep this business with us?</a:t>
+              <a:t>Would a service-pack offer on oil and fuel filters be workable for your dealers?</a:t>
             </a:r>
           </a:p>
         </p:txBody>
@@ -11223,7 +10716,7 @@
                 </a:solidFill>
                 <a:latin typeface="Calibri"/>
               </a:rPr>
-              <a:t>PARTS PERFORMANCE — FILTERS</a:t>
+              <a:t>PARTS PERFORMANCE — ELECTRICAL SENSORS</a:t>
             </a:r>
           </a:p>
         </p:txBody>
@@ -11258,7 +10751,7 @@
                 </a:solidFill>
                 <a:latin typeface="Calibri"/>
               </a:rPr>
-              <a:t>Filters — CY H1 2026 vs CY H1 2025 (commercial, ex-warranty)</a:t>
+              <a:t>Electrical sensors — CY H1 2026 vs CY H1 2025 (commercial, ex-warranty)</a:t>
             </a:r>
           </a:p>
         </p:txBody>
@@ -11387,7 +10880,7 @@
                 </a:solidFill>
                 <a:latin typeface="Calibri"/>
               </a:rPr>
-              <a:t>EUR 45,771 (CY H1 2025) to EUR 28,035 (CY H1 2026), down EUR 17,737 (-39%).</a:t>
+              <a:t>EUR 68,893 (CY H1 2025) to EUR 54,240 (CY H1 2026), down EUR 14,653 (-21%).</a:t>
             </a:r>
           </a:p>
           <a:p>
@@ -11443,7 +10936,7 @@
                 </a:solidFill>
                 <a:latin typeface="Calibri"/>
               </a:rPr>
-              <a:t>8980329082 (FILTER ASM): EUR 3,366 to EUR 0, 4 fewer pieces.</a:t>
+              <a:t>8983528481 (SENSOR; NOX): EUR 16,129 to EUR 10,240, 22 fewer pieces.</a:t>
             </a:r>
           </a:p>
           <a:p>
@@ -11471,7 +10964,7 @@
                 </a:solidFill>
                 <a:latin typeface="Calibri"/>
               </a:rPr>
-              <a:t>8983282070 (ELEMENT; OIL FILTER · FRR,FS*,FTR,FVR,NPS,N*R): EUR 4,666 to EUR 1,568, 212 fewer pieces.</a:t>
+              <a:t>8976695331 (METER COMPL; CLUSTER): EUR 4,616 to EUR 318, 13 fewer pieces.</a:t>
             </a:r>
           </a:p>
           <a:p>
@@ -11499,7 +10992,7 @@
                 </a:solidFill>
                 <a:latin typeface="Calibri"/>
               </a:rPr>
-              <a:t>8975425400 (ELEMENT; FUEL FILTER · FV*,FT*,FS*,FR*,N*R,N*S): EUR 3,649 to EUR 996, 209 fewer pieces.</a:t>
+              <a:t>8982201260 (SENSOR; SPEED): EUR 1,452 to EUR 0, 7 fewer pieces.</a:t>
             </a:r>
           </a:p>
           <a:p>
@@ -11527,7 +11020,7 @@
                 </a:solidFill>
                 <a:latin typeface="Calibri"/>
               </a:rPr>
-              <a:t>5876102200 (ELEMENT KIT; FUEL FILTER · N*R,NPS): EUR 1,711 to EUR 250, 76 fewer pieces.</a:t>
+              <a:t>8976695321 (METER COMPL; CLUSTER): EUR 1,319 to EUR 0, 4 fewer pieces.</a:t>
             </a:r>
           </a:p>
         </p:txBody>
@@ -11613,7 +11106,7 @@
                 </a:solidFill>
                 <a:latin typeface="Calibri"/>
               </a:rPr>
-              <a:t>Are dealers stocking filters, or ordering line-by-line against each job?</a:t>
+              <a:t>Is this pricing against what the dealers can buy locally?</a:t>
             </a:r>
           </a:p>
           <a:p>
@@ -11641,7 +11134,7 @@
                 </a:solidFill>
                 <a:latin typeface="Calibri"/>
               </a:rPr>
-              <a:t>How much servicing do you estimate is happening outside the franchised network?</a:t>
+              <a:t>Is any of this stock timing on your side rather than end demand?</a:t>
             </a:r>
           </a:p>
           <a:p>
@@ -11669,7 +11162,7 @@
                 </a:solidFill>
                 <a:latin typeface="Calibri"/>
               </a:rPr>
-              <a:t>Would a service-pack offer on oil and fuel filters be workable for your dealers?</a:t>
+              <a:t>What would make the biggest difference to keep this business with us?</a:t>
             </a:r>
           </a:p>
         </p:txBody>
@@ -11961,7 +11454,7 @@
                 </a:solidFill>
                 <a:latin typeface="Calibri"/>
               </a:rPr>
-              <a:t>EUR 17,244 (CY H1 2025) to EUR 2,500 (CY H1 2026), down EUR 14,744 (-86%).</a:t>
+              <a:t>EUR 17,244 (CY H1 2025) to EUR 2,628 (CY H1 2026), down EUR 14,616 (-85%).</a:t>
             </a:r>
           </a:p>
           <a:p>
@@ -13461,7 +12954,7 @@
                           </a:solidFill>
                           <a:latin typeface="Calibri"/>
                         </a:rPr>
-                        <a:t>EUR 2,319</a:t>
+                        <a:t>EUR 2,448</a:t>
                       </a:r>
                     </a:p>
                   </a:txBody>
@@ -13484,7 +12977,7 @@
                           </a:solidFill>
                           <a:latin typeface="Calibri"/>
                         </a:rPr>
-                        <a:t>EUR 1,529</a:t>
+                        <a:t>EUR 1,657</a:t>
                       </a:r>
                     </a:p>
                   </a:txBody>
@@ -14233,6 +13726,194 @@
                           </a:solidFill>
                           <a:latin typeface="Calibri"/>
                         </a:rPr>
+                        <a:t>7552392890</a:t>
+                      </a:r>
+                    </a:p>
+                  </a:txBody>
+                  <a:tcPr anchor="ctr" marL="73152" marR="73152">
+                    <a:solidFill>
+                      <a:srgbClr val="ECECEC"/>
+                    </a:solidFill>
+                  </a:tcPr>
+                </a:tc>
+                <a:tc>
+                  <a:txBody>
+                    <a:bodyPr/>
+                    <a:lstStyle/>
+                    <a:p>
+                      <a:pPr algn="l"/>
+                      <a:r>
+                        <a:rPr sz="1150" b="0">
+                          <a:solidFill>
+                            <a:srgbClr val="1A1A1A"/>
+                          </a:solidFill>
+                          <a:latin typeface="Calibri"/>
+                        </a:rPr>
+                        <a:t>CAMERA ASM</a:t>
+                      </a:r>
+                    </a:p>
+                  </a:txBody>
+                  <a:tcPr anchor="ctr" marL="73152" marR="73152">
+                    <a:solidFill>
+                      <a:srgbClr val="ECECEC"/>
+                    </a:solidFill>
+                  </a:tcPr>
+                </a:tc>
+                <a:tc>
+                  <a:txBody>
+                    <a:bodyPr/>
+                    <a:lstStyle/>
+                    <a:p>
+                      <a:pPr algn="r"/>
+                      <a:r>
+                        <a:rPr sz="1150" b="0">
+                          <a:solidFill>
+                            <a:srgbClr val="1A1A1A"/>
+                          </a:solidFill>
+                          <a:latin typeface="Calibri"/>
+                        </a:rPr>
+                        <a:t>EUR 3,981</a:t>
+                      </a:r>
+                    </a:p>
+                  </a:txBody>
+                  <a:tcPr anchor="ctr" marL="73152" marR="73152">
+                    <a:solidFill>
+                      <a:srgbClr val="ECECEC"/>
+                    </a:solidFill>
+                  </a:tcPr>
+                </a:tc>
+                <a:tc>
+                  <a:txBody>
+                    <a:bodyPr/>
+                    <a:lstStyle/>
+                    <a:p>
+                      <a:pPr algn="l"/>
+                      <a:r>
+                        <a:rPr sz="1150" b="0">
+                          <a:solidFill>
+                            <a:srgbClr val="1A1A1A"/>
+                          </a:solidFill>
+                          <a:latin typeface="Calibri"/>
+                        </a:rPr>
+                        <a:t>Warranty / campaign</a:t>
+                      </a:r>
+                    </a:p>
+                  </a:txBody>
+                  <a:tcPr anchor="ctr" marL="73152" marR="73152">
+                    <a:solidFill>
+                      <a:srgbClr val="ECECEC"/>
+                    </a:solidFill>
+                  </a:tcPr>
+                </a:tc>
+              </a:tr>
+              <a:tr h="365760">
+                <a:tc>
+                  <a:txBody>
+                    <a:bodyPr/>
+                    <a:lstStyle/>
+                    <a:p>
+                      <a:pPr algn="l"/>
+                      <a:r>
+                        <a:rPr sz="1150" b="0">
+                          <a:solidFill>
+                            <a:srgbClr val="1A1A1A"/>
+                          </a:solidFill>
+                          <a:latin typeface="Calibri"/>
+                        </a:rPr>
+                        <a:t>7552348280</a:t>
+                      </a:r>
+                    </a:p>
+                  </a:txBody>
+                  <a:tcPr anchor="ctr" marL="73152" marR="73152">
+                    <a:solidFill>
+                      <a:srgbClr val="FFFFFF"/>
+                    </a:solidFill>
+                  </a:tcPr>
+                </a:tc>
+                <a:tc>
+                  <a:txBody>
+                    <a:bodyPr/>
+                    <a:lstStyle/>
+                    <a:p>
+                      <a:pPr algn="l"/>
+                      <a:r>
+                        <a:rPr sz="1150" b="0">
+                          <a:solidFill>
+                            <a:srgbClr val="1A1A1A"/>
+                          </a:solidFill>
+                          <a:latin typeface="Calibri"/>
+                        </a:rPr>
+                        <a:t>STEERING UNIT</a:t>
+                      </a:r>
+                    </a:p>
+                  </a:txBody>
+                  <a:tcPr anchor="ctr" marL="73152" marR="73152">
+                    <a:solidFill>
+                      <a:srgbClr val="FFFFFF"/>
+                    </a:solidFill>
+                  </a:tcPr>
+                </a:tc>
+                <a:tc>
+                  <a:txBody>
+                    <a:bodyPr/>
+                    <a:lstStyle/>
+                    <a:p>
+                      <a:pPr algn="r"/>
+                      <a:r>
+                        <a:rPr sz="1150" b="0">
+                          <a:solidFill>
+                            <a:srgbClr val="1A1A1A"/>
+                          </a:solidFill>
+                          <a:latin typeface="Calibri"/>
+                        </a:rPr>
+                        <a:t>EUR 3,968</a:t>
+                      </a:r>
+                    </a:p>
+                  </a:txBody>
+                  <a:tcPr anchor="ctr" marL="73152" marR="73152">
+                    <a:solidFill>
+                      <a:srgbClr val="FFFFFF"/>
+                    </a:solidFill>
+                  </a:tcPr>
+                </a:tc>
+                <a:tc>
+                  <a:txBody>
+                    <a:bodyPr/>
+                    <a:lstStyle/>
+                    <a:p>
+                      <a:pPr algn="l"/>
+                      <a:r>
+                        <a:rPr sz="1150" b="0">
+                          <a:solidFill>
+                            <a:srgbClr val="1A1A1A"/>
+                          </a:solidFill>
+                          <a:latin typeface="Calibri"/>
+                        </a:rPr>
+                        <a:t>Warranty / campaign</a:t>
+                      </a:r>
+                    </a:p>
+                  </a:txBody>
+                  <a:tcPr anchor="ctr" marL="73152" marR="73152">
+                    <a:solidFill>
+                      <a:srgbClr val="FFFFFF"/>
+                    </a:solidFill>
+                  </a:tcPr>
+                </a:tc>
+              </a:tr>
+              <a:tr h="365760">
+                <a:tc>
+                  <a:txBody>
+                    <a:bodyPr/>
+                    <a:lstStyle/>
+                    <a:p>
+                      <a:pPr algn="l"/>
+                      <a:r>
+                        <a:rPr sz="1150" b="0">
+                          <a:solidFill>
+                            <a:srgbClr val="1A1A1A"/>
+                          </a:solidFill>
+                          <a:latin typeface="Calibri"/>
+                        </a:rPr>
                         <a:t>8974842450</a:t>
                       </a:r>
                     </a:p>
@@ -14313,194 +13994,6 @@
                   </a:tcPr>
                 </a:tc>
               </a:tr>
-              <a:tr h="365760">
-                <a:tc>
-                  <a:txBody>
-                    <a:bodyPr/>
-                    <a:lstStyle/>
-                    <a:p>
-                      <a:pPr algn="l"/>
-                      <a:r>
-                        <a:rPr sz="1150" b="0">
-                          <a:solidFill>
-                            <a:srgbClr val="1A1A1A"/>
-                          </a:solidFill>
-                          <a:latin typeface="Calibri"/>
-                        </a:rPr>
-                        <a:t>8980830414</a:t>
-                      </a:r>
-                    </a:p>
-                  </a:txBody>
-                  <a:tcPr anchor="ctr" marL="73152" marR="73152">
-                    <a:solidFill>
-                      <a:srgbClr val="FFFFFF"/>
-                    </a:solidFill>
-                  </a:tcPr>
-                </a:tc>
-                <a:tc>
-                  <a:txBody>
-                    <a:bodyPr/>
-                    <a:lstStyle/>
-                    <a:p>
-                      <a:pPr algn="l"/>
-                      <a:r>
-                        <a:rPr sz="1150" b="0">
-                          <a:solidFill>
-                            <a:srgbClr val="1A1A1A"/>
-                          </a:solidFill>
-                          <a:latin typeface="Calibri"/>
-                        </a:rPr>
-                        <a:t>TURBOCHARGER ASM</a:t>
-                      </a:r>
-                    </a:p>
-                  </a:txBody>
-                  <a:tcPr anchor="ctr" marL="73152" marR="73152">
-                    <a:solidFill>
-                      <a:srgbClr val="FFFFFF"/>
-                    </a:solidFill>
-                  </a:tcPr>
-                </a:tc>
-                <a:tc>
-                  <a:txBody>
-                    <a:bodyPr/>
-                    <a:lstStyle/>
-                    <a:p>
-                      <a:pPr algn="r"/>
-                      <a:r>
-                        <a:rPr sz="1150" b="0">
-                          <a:solidFill>
-                            <a:srgbClr val="1A1A1A"/>
-                          </a:solidFill>
-                          <a:latin typeface="Calibri"/>
-                        </a:rPr>
-                        <a:t>EUR 3,345</a:t>
-                      </a:r>
-                    </a:p>
-                  </a:txBody>
-                  <a:tcPr anchor="ctr" marL="73152" marR="73152">
-                    <a:solidFill>
-                      <a:srgbClr val="FFFFFF"/>
-                    </a:solidFill>
-                  </a:tcPr>
-                </a:tc>
-                <a:tc>
-                  <a:txBody>
-                    <a:bodyPr/>
-                    <a:lstStyle/>
-                    <a:p>
-                      <a:pPr algn="l"/>
-                      <a:r>
-                        <a:rPr sz="1150" b="0">
-                          <a:solidFill>
-                            <a:srgbClr val="1A1A1A"/>
-                          </a:solidFill>
-                          <a:latin typeface="Calibri"/>
-                        </a:rPr>
-                        <a:t>Validate</a:t>
-                      </a:r>
-                    </a:p>
-                  </a:txBody>
-                  <a:tcPr anchor="ctr" marL="73152" marR="73152">
-                    <a:solidFill>
-                      <a:srgbClr val="FFFFFF"/>
-                    </a:solidFill>
-                  </a:tcPr>
-                </a:tc>
-              </a:tr>
-              <a:tr h="365760">
-                <a:tc>
-                  <a:txBody>
-                    <a:bodyPr/>
-                    <a:lstStyle/>
-                    <a:p>
-                      <a:pPr algn="l"/>
-                      <a:r>
-                        <a:rPr sz="1150" b="0">
-                          <a:solidFill>
-                            <a:srgbClr val="1A1A1A"/>
-                          </a:solidFill>
-                          <a:latin typeface="Calibri"/>
-                        </a:rPr>
-                        <a:t>8983767550</a:t>
-                      </a:r>
-                    </a:p>
-                  </a:txBody>
-                  <a:tcPr anchor="ctr" marL="73152" marR="73152">
-                    <a:solidFill>
-                      <a:srgbClr val="ECECEC"/>
-                    </a:solidFill>
-                  </a:tcPr>
-                </a:tc>
-                <a:tc>
-                  <a:txBody>
-                    <a:bodyPr/>
-                    <a:lstStyle/>
-                    <a:p>
-                      <a:pPr algn="l"/>
-                      <a:r>
-                        <a:rPr sz="1150" b="0">
-                          <a:solidFill>
-                            <a:srgbClr val="1A1A1A"/>
-                          </a:solidFill>
-                          <a:latin typeface="Calibri"/>
-                        </a:rPr>
-                        <a:t>ROTOR; DISC BRK,FRT</a:t>
-                      </a:r>
-                    </a:p>
-                  </a:txBody>
-                  <a:tcPr anchor="ctr" marL="73152" marR="73152">
-                    <a:solidFill>
-                      <a:srgbClr val="ECECEC"/>
-                    </a:solidFill>
-                  </a:tcPr>
-                </a:tc>
-                <a:tc>
-                  <a:txBody>
-                    <a:bodyPr/>
-                    <a:lstStyle/>
-                    <a:p>
-                      <a:pPr algn="r"/>
-                      <a:r>
-                        <a:rPr sz="1150" b="0">
-                          <a:solidFill>
-                            <a:srgbClr val="1A1A1A"/>
-                          </a:solidFill>
-                          <a:latin typeface="Calibri"/>
-                        </a:rPr>
-                        <a:t>EUR 3,009</a:t>
-                      </a:r>
-                    </a:p>
-                  </a:txBody>
-                  <a:tcPr anchor="ctr" marL="73152" marR="73152">
-                    <a:solidFill>
-                      <a:srgbClr val="ECECEC"/>
-                    </a:solidFill>
-                  </a:tcPr>
-                </a:tc>
-                <a:tc>
-                  <a:txBody>
-                    <a:bodyPr/>
-                    <a:lstStyle/>
-                    <a:p>
-                      <a:pPr algn="l"/>
-                      <a:r>
-                        <a:rPr sz="1150" b="0">
-                          <a:solidFill>
-                            <a:srgbClr val="1A1A1A"/>
-                          </a:solidFill>
-                          <a:latin typeface="Calibri"/>
-                        </a:rPr>
-                        <a:t>Warranty / campaign</a:t>
-                      </a:r>
-                    </a:p>
-                  </a:txBody>
-                  <a:tcPr anchor="ctr" marL="73152" marR="73152">
-                    <a:solidFill>
-                      <a:srgbClr val="ECECEC"/>
-                    </a:solidFill>
-                  </a:tcPr>
-                </a:tc>
-              </a:tr>
             </a:tbl>
           </a:graphicData>
         </a:graphic>
@@ -14871,7 +14364,7 @@
                 </a:solidFill>
                 <a:latin typeface="Calibri"/>
               </a:rPr>
-              <a:t>FY2026 Sales-to-Dealer is EUR 2,833,637 (reported KPI).</a:t>
+              <a:t>FY2026 Sales-to-Dealer is EUR 1,718,249 (working estimate).</a:t>
             </a:r>
           </a:p>
           <a:p>
@@ -14927,7 +14420,7 @@
                 </a:solidFill>
                 <a:latin typeface="Calibri"/>
               </a:rPr>
-              <a:t>Applying fleet movement, the 5% price adjustment and 1.8% additional growth gives a FY2027 Sales-to-Dealer target of EUR 3,585,313.</a:t>
+              <a:t>Applying fleet movement, the 5% price adjustment and 1.8% additional growth gives a FY2027 Sales-to-Dealer target of EUR 2,174,046.</a:t>
             </a:r>
           </a:p>
           <a:p>
